--- a/book/puja.pptx
+++ b/book/puja.pptx
@@ -11195,8 +11195,8 @@
         </p:nvSpPr>
         <p:spPr>
           <a:xfrm>
-            <a:off x="3443335" y="6386731"/>
-            <a:ext cx="5305330" cy="369332"/>
+            <a:off x="2180376" y="6386731"/>
+            <a:ext cx="7831247" cy="369332"/>
           </a:xfrm>
           <a:prstGeom prst="rect">
             <a:avLst/>
@@ -11214,7 +11214,21 @@
                 <a:latin typeface="Times New Roman" panose="02020603050405020304" pitchFamily="18" charset="0"/>
                 <a:cs typeface="Times New Roman" panose="02020603050405020304" pitchFamily="18" charset="0"/>
               </a:rPr>
-              <a:t>Figure : Word segmentation Bengali script using VPP.</a:t>
+              <a:t>Figure : Comparing of character segmentation </a:t>
+            </a:r>
+            <a:r>
+              <a:rPr lang="en-US">
+                <a:latin typeface="Times New Roman" panose="02020603050405020304" pitchFamily="18" charset="0"/>
+                <a:cs typeface="Times New Roman" panose="02020603050405020304" pitchFamily="18" charset="0"/>
+              </a:rPr>
+              <a:t>with Tessarect </a:t>
+            </a:r>
+            <a:r>
+              <a:rPr lang="en-US" dirty="0">
+                <a:latin typeface="Times New Roman" panose="02020603050405020304" pitchFamily="18" charset="0"/>
+                <a:cs typeface="Times New Roman" panose="02020603050405020304" pitchFamily="18" charset="0"/>
+              </a:rPr>
+              <a:t>OCR engine.</a:t>
             </a:r>
             <a:endParaRPr lang="en-US" sz="2400" dirty="0">
               <a:latin typeface="Times New Roman" panose="02020603050405020304" pitchFamily="18" charset="0"/>
@@ -16276,21 +16290,21 @@
 </file>
 
 <file path=customXml/item1.xml><?xml version="1.0" encoding="utf-8"?>
+<?mso-contentType ?>
+<FormTemplates xmlns="http://schemas.microsoft.com/sharepoint/v3/contenttype/forms">
+  <Display>DocumentLibraryForm</Display>
+  <Edit>DocumentLibraryForm</Edit>
+  <New>DocumentLibraryForm</New>
+</FormTemplates>
+</file>
+
+<file path=customXml/item2.xml><?xml version="1.0" encoding="utf-8"?>
 <p:properties xmlns:p="http://schemas.microsoft.com/office/2006/metadata/properties" xmlns:xsi="http://www.w3.org/2001/XMLSchema-instance" xmlns:pc="http://schemas.microsoft.com/office/infopath/2007/PartnerControls">
   <documentManagement>
     <Status xmlns="71af3243-3dd4-4a8d-8c0d-dd76da1f02a5">Not started</Status>
     <MediaServiceKeyPoints xmlns="71af3243-3dd4-4a8d-8c0d-dd76da1f02a5" xsi:nil="true"/>
   </documentManagement>
 </p:properties>
-</file>
-
-<file path=customXml/item2.xml><?xml version="1.0" encoding="utf-8"?>
-<?mso-contentType ?>
-<FormTemplates xmlns="http://schemas.microsoft.com/sharepoint/v3/contenttype/forms">
-  <Display>DocumentLibraryForm</Display>
-  <Edit>DocumentLibraryForm</Edit>
-  <New>DocumentLibraryForm</New>
-</FormTemplates>
 </file>
 
 <file path=customXml/item3.xml><?xml version="1.0" encoding="utf-8"?>
@@ -16515,19 +16529,19 @@
 </file>
 
 <file path=customXml/itemProps1.xml><?xml version="1.0" encoding="utf-8"?>
+<ds:datastoreItem xmlns:ds="http://schemas.openxmlformats.org/officeDocument/2006/customXml" ds:itemID="{7E0A2CB4-6869-426F-8BC4-A32C90CBE263}">
+  <ds:schemaRefs>
+    <ds:schemaRef ds:uri="http://schemas.microsoft.com/sharepoint/v3/contenttype/forms"/>
+  </ds:schemaRefs>
+</ds:datastoreItem>
+</file>
+
+<file path=customXml/itemProps2.xml><?xml version="1.0" encoding="utf-8"?>
 <ds:datastoreItem xmlns:ds="http://schemas.openxmlformats.org/officeDocument/2006/customXml" ds:itemID="{A4E879E6-8FFE-4154-8F2A-F7518B89B376}">
   <ds:schemaRefs>
     <ds:schemaRef ds:uri="http://schemas.microsoft.com/office/2006/metadata/properties"/>
     <ds:schemaRef ds:uri="http://schemas.microsoft.com/office/infopath/2007/PartnerControls"/>
     <ds:schemaRef ds:uri="71af3243-3dd4-4a8d-8c0d-dd76da1f02a5"/>
-  </ds:schemaRefs>
-</ds:datastoreItem>
-</file>
-
-<file path=customXml/itemProps2.xml><?xml version="1.0" encoding="utf-8"?>
-<ds:datastoreItem xmlns:ds="http://schemas.openxmlformats.org/officeDocument/2006/customXml" ds:itemID="{7E0A2CB4-6869-426F-8BC4-A32C90CBE263}">
-  <ds:schemaRefs>
-    <ds:schemaRef ds:uri="http://schemas.microsoft.com/sharepoint/v3/contenttype/forms"/>
   </ds:schemaRefs>
 </ds:datastoreItem>
 </file>

--- a/book/puja.pptx
+++ b/book/puja.pptx
@@ -8858,6 +8858,11 @@
           <a:prstGeom prst="rect">
             <a:avLst/>
           </a:prstGeom>
+          <a:ln>
+            <a:solidFill>
+              <a:schemeClr val="accent2"/>
+            </a:solidFill>
+          </a:ln>
           <a:effectLst/>
         </p:spPr>
         <p:txBody>
@@ -8968,17 +8973,22 @@
         </p:nvSpPr>
         <p:spPr bwMode="white">
           <a:xfrm>
-            <a:off x="6527549" y="878186"/>
-            <a:ext cx="5663955" cy="1903216"/>
+            <a:off x="6527549" y="1314740"/>
+            <a:ext cx="5663955" cy="1466662"/>
           </a:xfrm>
           <a:prstGeom prst="rect">
             <a:avLst/>
           </a:prstGeom>
+          <a:ln>
+            <a:solidFill>
+              <a:schemeClr val="accent2"/>
+            </a:solidFill>
+          </a:ln>
           <a:effectLst/>
         </p:spPr>
         <p:txBody>
           <a:bodyPr vert="horz" lIns="91440" tIns="45720" rIns="91440" bIns="45720" rtlCol="0" anchor="ctr" anchorCtr="0">
-            <a:normAutofit/>
+            <a:normAutofit lnSpcReduction="10000"/>
           </a:bodyPr>
           <a:lstStyle>
             <a:lvl1pPr algn="l" defTabSz="457200" rtl="0" eaLnBrk="1" latinLnBrk="0" hangingPunct="1">
@@ -11517,7 +11527,21 @@
                 <a:latin typeface="Times New Roman" panose="02020603050405020304" pitchFamily="18" charset="0"/>
                 <a:cs typeface="Times New Roman" panose="02020603050405020304" pitchFamily="18" charset="0"/>
               </a:rPr>
-              <a:t>T. Zahan, M.R. Selim, M.S. Rahman, M.Z. Iqbal, (2018). “Connected Component Analysis Based Two Zone Approach for Bangla Character Segmentation.” 1-4.10.1109/ICBSLP.2018.8554684.</a:t>
+              <a:t>T. Zahan, M.R. Selim, M.S. Rahman, M.Z. Iqbal, (2018). “</a:t>
+            </a:r>
+            <a:r>
+              <a:rPr lang="en-US" sz="2000" i="1" dirty="0">
+                <a:latin typeface="Times New Roman" panose="02020603050405020304" pitchFamily="18" charset="0"/>
+                <a:cs typeface="Times New Roman" panose="02020603050405020304" pitchFamily="18" charset="0"/>
+              </a:rPr>
+              <a:t>Connected Component Analysis Based Two Zone Approach for Bangla Character Segmentation</a:t>
+            </a:r>
+            <a:r>
+              <a:rPr lang="en-US" sz="2000" dirty="0">
+                <a:latin typeface="Times New Roman" panose="02020603050405020304" pitchFamily="18" charset="0"/>
+                <a:cs typeface="Times New Roman" panose="02020603050405020304" pitchFamily="18" charset="0"/>
+              </a:rPr>
+              <a:t>.” 1-4.10.1109/ICBSLP.2018.8554684.</a:t>
             </a:r>
           </a:p>
         </p:txBody>
@@ -16290,21 +16314,21 @@
 </file>
 
 <file path=customXml/item1.xml><?xml version="1.0" encoding="utf-8"?>
+<p:properties xmlns:p="http://schemas.microsoft.com/office/2006/metadata/properties" xmlns:xsi="http://www.w3.org/2001/XMLSchema-instance" xmlns:pc="http://schemas.microsoft.com/office/infopath/2007/PartnerControls">
+  <documentManagement>
+    <Status xmlns="71af3243-3dd4-4a8d-8c0d-dd76da1f02a5">Not started</Status>
+    <MediaServiceKeyPoints xmlns="71af3243-3dd4-4a8d-8c0d-dd76da1f02a5" xsi:nil="true"/>
+  </documentManagement>
+</p:properties>
+</file>
+
+<file path=customXml/item2.xml><?xml version="1.0" encoding="utf-8"?>
 <?mso-contentType ?>
 <FormTemplates xmlns="http://schemas.microsoft.com/sharepoint/v3/contenttype/forms">
   <Display>DocumentLibraryForm</Display>
   <Edit>DocumentLibraryForm</Edit>
   <New>DocumentLibraryForm</New>
 </FormTemplates>
-</file>
-
-<file path=customXml/item2.xml><?xml version="1.0" encoding="utf-8"?>
-<p:properties xmlns:p="http://schemas.microsoft.com/office/2006/metadata/properties" xmlns:xsi="http://www.w3.org/2001/XMLSchema-instance" xmlns:pc="http://schemas.microsoft.com/office/infopath/2007/PartnerControls">
-  <documentManagement>
-    <Status xmlns="71af3243-3dd4-4a8d-8c0d-dd76da1f02a5">Not started</Status>
-    <MediaServiceKeyPoints xmlns="71af3243-3dd4-4a8d-8c0d-dd76da1f02a5" xsi:nil="true"/>
-  </documentManagement>
-</p:properties>
 </file>
 
 <file path=customXml/item3.xml><?xml version="1.0" encoding="utf-8"?>
@@ -16529,19 +16553,19 @@
 </file>
 
 <file path=customXml/itemProps1.xml><?xml version="1.0" encoding="utf-8"?>
-<ds:datastoreItem xmlns:ds="http://schemas.openxmlformats.org/officeDocument/2006/customXml" ds:itemID="{7E0A2CB4-6869-426F-8BC4-A32C90CBE263}">
+<ds:datastoreItem xmlns:ds="http://schemas.openxmlformats.org/officeDocument/2006/customXml" ds:itemID="{A4E879E6-8FFE-4154-8F2A-F7518B89B376}">
   <ds:schemaRefs>
-    <ds:schemaRef ds:uri="http://schemas.microsoft.com/sharepoint/v3/contenttype/forms"/>
+    <ds:schemaRef ds:uri="http://schemas.microsoft.com/office/2006/metadata/properties"/>
+    <ds:schemaRef ds:uri="http://schemas.microsoft.com/office/infopath/2007/PartnerControls"/>
+    <ds:schemaRef ds:uri="71af3243-3dd4-4a8d-8c0d-dd76da1f02a5"/>
   </ds:schemaRefs>
 </ds:datastoreItem>
 </file>
 
 <file path=customXml/itemProps2.xml><?xml version="1.0" encoding="utf-8"?>
-<ds:datastoreItem xmlns:ds="http://schemas.openxmlformats.org/officeDocument/2006/customXml" ds:itemID="{A4E879E6-8FFE-4154-8F2A-F7518B89B376}">
+<ds:datastoreItem xmlns:ds="http://schemas.openxmlformats.org/officeDocument/2006/customXml" ds:itemID="{7E0A2CB4-6869-426F-8BC4-A32C90CBE263}">
   <ds:schemaRefs>
-    <ds:schemaRef ds:uri="http://schemas.microsoft.com/office/2006/metadata/properties"/>
-    <ds:schemaRef ds:uri="http://schemas.microsoft.com/office/infopath/2007/PartnerControls"/>
-    <ds:schemaRef ds:uri="71af3243-3dd4-4a8d-8c0d-dd76da1f02a5"/>
+    <ds:schemaRef ds:uri="http://schemas.microsoft.com/sharepoint/v3/contenttype/forms"/>
   </ds:schemaRefs>
 </ds:datastoreItem>
 </file>

--- a/book/puja.pptx
+++ b/book/puja.pptx
@@ -239,7 +239,7 @@
           <a:p>
             <a:fld id="{6748E1AF-6343-46AA-8AEF-4C12F4118850}" type="datetimeFigureOut">
               <a:rPr lang="en-US" smtClean="0"/>
-              <a:t>06-Jul-20</a:t>
+              <a:t>07-Jul-20</a:t>
             </a:fld>
             <a:endParaRPr lang="en-US" dirty="0"/>
           </a:p>
@@ -416,7 +416,7 @@
           <a:p>
             <a:fld id="{DA9D2517-63AA-420A-887D-BE60360A8F4D}" type="datetimeFigureOut">
               <a:rPr lang="en-US" noProof="0" smtClean="0"/>
-              <a:t>06-Jul-20</a:t>
+              <a:t>07-Jul-20</a:t>
             </a:fld>
             <a:endParaRPr lang="en-US" noProof="0" dirty="0"/>
           </a:p>
@@ -985,7 +985,7 @@
           <a:p>
             <a:fld id="{5C9944BB-901F-4101-AAD9-F3F9660A6803}" type="datetime2">
               <a:rPr lang="en-US" noProof="0" smtClean="0"/>
-              <a:t>Monday, July 6, 2020</a:t>
+              <a:t>Tuesday, July 7, 2020</a:t>
             </a:fld>
             <a:endParaRPr lang="en-US" noProof="0" dirty="0"/>
           </a:p>
@@ -1604,7 +1604,7 @@
           <a:p>
             <a:fld id="{DD52EFED-3821-4252-B066-81DF622ABB93}" type="datetime2">
               <a:rPr lang="en-US" noProof="0" smtClean="0"/>
-              <a:t>Monday, July 6, 2020</a:t>
+              <a:t>Tuesday, July 7, 2020</a:t>
             </a:fld>
             <a:endParaRPr lang="en-US" noProof="0" dirty="0"/>
           </a:p>
@@ -1958,7 +1958,7 @@
           <a:p>
             <a:fld id="{0765F4B2-95AB-4443-9F28-03AD8938EA06}" type="datetime2">
               <a:rPr lang="en-US" smtClean="0"/>
-              <a:t>Monday, July 6, 2020</a:t>
+              <a:t>Tuesday, July 7, 2020</a:t>
             </a:fld>
             <a:endParaRPr lang="en-US" dirty="0"/>
           </a:p>
@@ -2354,7 +2354,7 @@
           <a:p>
             <a:fld id="{5BC7D056-A642-43A3-B203-9C21AEAD9466}" type="datetime2">
               <a:rPr lang="en-US" noProof="0" smtClean="0"/>
-              <a:t>Monday, July 6, 2020</a:t>
+              <a:t>Tuesday, July 7, 2020</a:t>
             </a:fld>
             <a:endParaRPr lang="en-US" noProof="0" dirty="0"/>
           </a:p>
@@ -2831,7 +2831,7 @@
           <a:p>
             <a:fld id="{D95F6834-5987-445D-80C1-222E1FC2D277}" type="datetime2">
               <a:rPr lang="en-US" noProof="0" smtClean="0"/>
-              <a:t>Monday, July 6, 2020</a:t>
+              <a:t>Tuesday, July 7, 2020</a:t>
             </a:fld>
             <a:endParaRPr lang="en-US" noProof="0" dirty="0"/>
           </a:p>
@@ -3216,7 +3216,7 @@
           <a:p>
             <a:fld id="{405D4D86-BCF3-49B6-95C6-F23DD933B6B9}" type="datetime2">
               <a:rPr lang="en-US" noProof="0" smtClean="0"/>
-              <a:t>Monday, July 6, 2020</a:t>
+              <a:t>Tuesday, July 7, 2020</a:t>
             </a:fld>
             <a:endParaRPr lang="en-US" noProof="0" dirty="0"/>
           </a:p>
@@ -3578,7 +3578,7 @@
           <a:p>
             <a:fld id="{37A86F2A-3DA7-4B63-9709-3605A14B6A55}" type="datetime2">
               <a:rPr lang="en-US" noProof="0" smtClean="0"/>
-              <a:t>Monday, July 6, 2020</a:t>
+              <a:t>Tuesday, July 7, 2020</a:t>
             </a:fld>
             <a:endParaRPr lang="en-US" noProof="0" dirty="0"/>
           </a:p>
@@ -4066,7 +4066,7 @@
           <a:p>
             <a:fld id="{FA3FE53B-DAB0-4423-9FCB-C9083E9C2645}" type="datetime2">
               <a:rPr lang="en-US" noProof="0" smtClean="0"/>
-              <a:t>Monday, July 6, 2020</a:t>
+              <a:t>Tuesday, July 7, 2020</a:t>
             </a:fld>
             <a:endParaRPr lang="en-US" noProof="0" dirty="0"/>
           </a:p>
@@ -4561,7 +4561,7 @@
           <a:p>
             <a:fld id="{F4CCD7F3-096C-4E5B-A197-7308942D4001}" type="datetime2">
               <a:rPr lang="en-US" noProof="0" smtClean="0"/>
-              <a:t>Monday, July 6, 2020</a:t>
+              <a:t>Tuesday, July 7, 2020</a:t>
             </a:fld>
             <a:endParaRPr lang="en-US" noProof="0" dirty="0"/>
           </a:p>
@@ -4993,7 +4993,7 @@
           <a:p>
             <a:fld id="{093B9231-83C0-4D2F-9AB1-C6ADB0CA623F}" type="datetime2">
               <a:rPr lang="en-US" noProof="0" smtClean="0"/>
-              <a:t>Monday, July 6, 2020</a:t>
+              <a:t>Tuesday, July 7, 2020</a:t>
             </a:fld>
             <a:endParaRPr lang="en-US" noProof="0" dirty="0"/>
           </a:p>
@@ -5247,7 +5247,7 @@
           <a:p>
             <a:fld id="{7DD3A87B-D27B-4669-B2FF-81DA53395577}" type="datetime2">
               <a:rPr lang="en-US" smtClean="0"/>
-              <a:t>Monday, July 6, 2020</a:t>
+              <a:t>Tuesday, July 7, 2020</a:t>
             </a:fld>
             <a:endParaRPr lang="en-US" dirty="0"/>
           </a:p>
@@ -5478,7 +5478,7 @@
           <a:p>
             <a:fld id="{96CE57BC-BF01-4133-9A7B-333F3E4796E1}" type="datetime2">
               <a:rPr lang="en-US" noProof="0" smtClean="0"/>
-              <a:t>Monday, July 6, 2020</a:t>
+              <a:t>Tuesday, July 7, 2020</a:t>
             </a:fld>
             <a:endParaRPr lang="en-US" noProof="0" dirty="0"/>
           </a:p>
@@ -5876,7 +5876,7 @@
           <a:p>
             <a:fld id="{0E06E2B4-71DF-401A-A5AD-E3E9B678914B}" type="datetime2">
               <a:rPr lang="en-US" noProof="0" smtClean="0"/>
-              <a:t>Monday, July 6, 2020</a:t>
+              <a:t>Tuesday, July 7, 2020</a:t>
             </a:fld>
             <a:endParaRPr lang="en-US" noProof="0" dirty="0"/>
           </a:p>
@@ -6117,7 +6117,7 @@
           <a:p>
             <a:fld id="{0BB6E837-5E5C-4ABC-B2B6-47473AC749E7}" type="datetime2">
               <a:rPr lang="en-US" smtClean="0"/>
-              <a:t>Monday, July 6, 2020</a:t>
+              <a:t>Tuesday, July 7, 2020</a:t>
             </a:fld>
             <a:endParaRPr lang="en-US" dirty="0"/>
           </a:p>
@@ -6315,7 +6315,7 @@
           <a:p>
             <a:fld id="{6E1740BF-A968-409A-BEFD-8D81A8EA189C}" type="datetime2">
               <a:rPr lang="en-US" noProof="0" smtClean="0"/>
-              <a:t>Monday, July 6, 2020</a:t>
+              <a:t>Tuesday, July 7, 2020</a:t>
             </a:fld>
             <a:endParaRPr lang="en-US" noProof="0" dirty="0"/>
           </a:p>
@@ -6770,7 +6770,7 @@
           <a:p>
             <a:fld id="{2E2D5AB1-A71C-4946-A337-64380CF8CC9C}" type="datetime2">
               <a:rPr lang="en-US" noProof="0" smtClean="0"/>
-              <a:t>Monday, July 6, 2020</a:t>
+              <a:t>Tuesday, July 7, 2020</a:t>
             </a:fld>
             <a:endParaRPr lang="en-US" noProof="0" dirty="0"/>
           </a:p>
@@ -7348,7 +7348,7 @@
           <a:p>
             <a:fld id="{A995E87B-542F-419C-88D5-9A3CC43211E6}" type="datetime2">
               <a:rPr lang="en-US" smtClean="0"/>
-              <a:t>Monday, July 6, 2020</a:t>
+              <a:t>Tuesday, July 7, 2020</a:t>
             </a:fld>
             <a:endParaRPr lang="en-US" dirty="0"/>
           </a:p>
@@ -7749,7 +7749,7 @@
           <a:p>
             <a:fld id="{39FD4E80-31CA-4027-8BB1-5262B9EE189A}" type="datetime2">
               <a:rPr lang="en-US" smtClean="0"/>
-              <a:t>Monday, July 6, 2020</a:t>
+              <a:t>Tuesday, July 7, 2020</a:t>
             </a:fld>
             <a:endParaRPr lang="en-US" dirty="0"/>
           </a:p>
@@ -7889,7 +7889,7 @@
           <a:p>
             <a:fld id="{62E54B30-F80E-444D-8B0E-80AB9BCEF812}" type="datetime2">
               <a:rPr lang="en-US" smtClean="0"/>
-              <a:t>Monday, July 6, 2020</a:t>
+              <a:t>Tuesday, July 7, 2020</a:t>
             </a:fld>
             <a:endParaRPr lang="en-US" dirty="0"/>
           </a:p>
@@ -8079,7 +8079,7 @@
           <a:p>
             <a:fld id="{1AB854B5-8C9F-4641-9122-5745D9CED2A4}" type="datetime2">
               <a:rPr lang="en-US" noProof="0" smtClean="0"/>
-              <a:t>Monday, July 6, 2020</a:t>
+              <a:t>Tuesday, July 7, 2020</a:t>
             </a:fld>
             <a:endParaRPr lang="en-US" noProof="0" dirty="0"/>
           </a:p>
@@ -8392,7 +8392,7 @@
           <a:p>
             <a:fld id="{8763756A-7B39-4EF2-9803-2EACB5D7FB84}" type="datetime2">
               <a:rPr lang="en-US" noProof="0" smtClean="0"/>
-              <a:t>Monday, July 6, 2020</a:t>
+              <a:t>Tuesday, July 7, 2020</a:t>
             </a:fld>
             <a:endParaRPr lang="en-US" noProof="0" dirty="0"/>
           </a:p>
@@ -9910,7 +9910,7 @@
                 <a:latin typeface="Times New Roman" panose="02020603050405020304" pitchFamily="18" charset="0"/>
                 <a:cs typeface="Times New Roman" panose="02020603050405020304" pitchFamily="18" charset="0"/>
               </a:rPr>
-              <a:t>Monday, July 6, 2020</a:t>
+              <a:t>Tuesday, July 7, 2020</a:t>
             </a:fld>
             <a:endParaRPr lang="en-US" noProof="0" dirty="0">
               <a:latin typeface="Times New Roman" panose="02020603050405020304" pitchFamily="18" charset="0"/>
@@ -10494,7 +10494,7 @@
                 <a:latin typeface="Times New Roman" panose="02020603050405020304" pitchFamily="18" charset="0"/>
                 <a:cs typeface="Times New Roman" panose="02020603050405020304" pitchFamily="18" charset="0"/>
               </a:rPr>
-              <a:t>Monday, July 6, 2020</a:t>
+              <a:t>Tuesday, July 7, 2020</a:t>
             </a:fld>
             <a:endParaRPr lang="en-US" dirty="0">
               <a:latin typeface="Times New Roman" panose="02020603050405020304" pitchFamily="18" charset="0"/>
@@ -11033,7 +11033,7 @@
                 <a:latin typeface="Times New Roman" panose="02020603050405020304" pitchFamily="18" charset="0"/>
                 <a:cs typeface="Times New Roman" panose="02020603050405020304" pitchFamily="18" charset="0"/>
               </a:rPr>
-              <a:t>Morphological Opening Operation </a:t>
+              <a:t>Morphological Closing Operation </a:t>
             </a:r>
           </a:p>
         </p:txBody>
@@ -11071,21 +11071,7 @@
                 <a:latin typeface="Times New Roman" panose="02020603050405020304" pitchFamily="18" charset="0"/>
                 <a:cs typeface="Times New Roman" panose="02020603050405020304" pitchFamily="18" charset="0"/>
               </a:rPr>
-              <a:t>Figure 5: Character segmentation </a:t>
-            </a:r>
-            <a:r>
-              <a:rPr lang="en-US" dirty="0" err="1">
-                <a:latin typeface="Times New Roman" panose="02020603050405020304" pitchFamily="18" charset="0"/>
-                <a:cs typeface="Times New Roman" panose="02020603050405020304" pitchFamily="18" charset="0"/>
-              </a:rPr>
-              <a:t>processe</a:t>
-            </a:r>
-            <a:r>
-              <a:rPr lang="en-US" dirty="0">
-                <a:latin typeface="Times New Roman" panose="02020603050405020304" pitchFamily="18" charset="0"/>
-                <a:cs typeface="Times New Roman" panose="02020603050405020304" pitchFamily="18" charset="0"/>
-              </a:rPr>
-              <a:t>.</a:t>
+              <a:t>Figure 5: Character segmentation process.</a:t>
             </a:r>
             <a:endParaRPr lang="en-US" sz="2400" dirty="0">
               <a:latin typeface="Times New Roman" panose="02020603050405020304" pitchFamily="18" charset="0"/>
@@ -11150,7 +11136,7 @@
                 <a:latin typeface="Times New Roman" panose="02020603050405020304" pitchFamily="18" charset="0"/>
                 <a:cs typeface="Times New Roman" panose="02020603050405020304" pitchFamily="18" charset="0"/>
               </a:rPr>
-              <a:t>Monday, July 6, 2020</a:t>
+              <a:t>Tuesday, July 7, 2020</a:t>
             </a:fld>
             <a:endParaRPr lang="en-US" dirty="0">
               <a:latin typeface="Times New Roman" panose="02020603050405020304" pitchFamily="18" charset="0"/>
@@ -11685,7 +11671,7 @@
                 <a:latin typeface="Times New Roman" panose="02020603050405020304" pitchFamily="18" charset="0"/>
                 <a:cs typeface="Times New Roman" panose="02020603050405020304" pitchFamily="18" charset="0"/>
               </a:rPr>
-              <a:t>Monday, July 6, 2020</a:t>
+              <a:t>Tuesday, July 7, 2020</a:t>
             </a:fld>
             <a:endParaRPr lang="en-US" dirty="0">
               <a:latin typeface="Times New Roman" panose="02020603050405020304" pitchFamily="18" charset="0"/>
@@ -12220,7 +12206,7 @@
                 <a:latin typeface="Times New Roman" panose="02020603050405020304" pitchFamily="18" charset="0"/>
                 <a:cs typeface="Times New Roman" panose="02020603050405020304" pitchFamily="18" charset="0"/>
               </a:rPr>
-              <a:t>Monday, July 6, 2020</a:t>
+              <a:t>Tuesday, July 7, 2020</a:t>
             </a:fld>
             <a:endParaRPr lang="en-US" dirty="0">
               <a:latin typeface="Times New Roman" panose="02020603050405020304" pitchFamily="18" charset="0"/>
@@ -12608,7 +12594,7 @@
                 <a:latin typeface="Times New Roman" panose="02020603050405020304" pitchFamily="18" charset="0"/>
                 <a:cs typeface="Times New Roman" panose="02020603050405020304" pitchFamily="18" charset="0"/>
               </a:rPr>
-              <a:t>Monday, July 6, 2020</a:t>
+              <a:t>Tuesday, July 7, 2020</a:t>
             </a:fld>
             <a:endParaRPr lang="en-US" dirty="0">
               <a:latin typeface="Times New Roman" panose="02020603050405020304" pitchFamily="18" charset="0"/>
@@ -12996,7 +12982,7 @@
                 <a:latin typeface="Times New Roman" panose="02020603050405020304" pitchFamily="18" charset="0"/>
                 <a:cs typeface="Times New Roman" panose="02020603050405020304" pitchFamily="18" charset="0"/>
               </a:rPr>
-              <a:t>Monday, July 6, 2020</a:t>
+              <a:t>Tuesday, July 7, 2020</a:t>
             </a:fld>
             <a:endParaRPr lang="en-US" dirty="0">
               <a:latin typeface="Times New Roman" panose="02020603050405020304" pitchFamily="18" charset="0"/>
@@ -13384,7 +13370,7 @@
                 <a:latin typeface="Times New Roman" panose="02020603050405020304" pitchFamily="18" charset="0"/>
                 <a:cs typeface="Times New Roman" panose="02020603050405020304" pitchFamily="18" charset="0"/>
               </a:rPr>
-              <a:t>Monday, July 6, 2020</a:t>
+              <a:t>Tuesday, July 7, 2020</a:t>
             </a:fld>
             <a:endParaRPr lang="en-US" dirty="0">
               <a:latin typeface="Times New Roman" panose="02020603050405020304" pitchFamily="18" charset="0"/>
@@ -13675,7 +13661,7 @@
                 <a:latin typeface="Times New Roman" panose="02020603050405020304" pitchFamily="18" charset="0"/>
                 <a:cs typeface="Times New Roman" panose="02020603050405020304" pitchFamily="18" charset="0"/>
               </a:rPr>
-              <a:t>Monday, July 6, 2020</a:t>
+              <a:t>Tuesday, July 7, 2020</a:t>
             </a:fld>
             <a:endParaRPr lang="en-US" noProof="0" dirty="0">
               <a:latin typeface="Times New Roman" panose="02020603050405020304" pitchFamily="18" charset="0"/>
@@ -14062,7 +14048,7 @@
                 <a:latin typeface="Times New Roman" panose="02020603050405020304" pitchFamily="18" charset="0"/>
                 <a:cs typeface="Times New Roman" panose="02020603050405020304" pitchFamily="18" charset="0"/>
               </a:rPr>
-              <a:t>Monday, July 6, 2020</a:t>
+              <a:t>Tuesday, July 7, 2020</a:t>
             </a:fld>
             <a:endParaRPr lang="en-US" dirty="0">
               <a:latin typeface="Times New Roman" panose="02020603050405020304" pitchFamily="18" charset="0"/>
@@ -14192,41 +14178,6 @@
           </a:p>
         </p:txBody>
       </p:sp>
-      <p:sp>
-        <p:nvSpPr>
-          <p:cNvPr id="3" name="Content Placeholder 2"/>
-          <p:cNvSpPr>
-            <a:spLocks noGrp="1"/>
-          </p:cNvSpPr>
-          <p:nvPr>
-            <p:ph idx="1"/>
-          </p:nvPr>
-        </p:nvSpPr>
-        <p:spPr/>
-        <p:txBody>
-          <a:bodyPr/>
-          <a:lstStyle/>
-          <a:p>
-            <a:pPr>
-              <a:buNone/>
-            </a:pPr>
-            <a:r>
-              <a:rPr lang="en-US" dirty="0">
-                <a:latin typeface="Times New Roman" panose="02020603050405020304" pitchFamily="18" charset="0"/>
-                <a:cs typeface="Times New Roman" panose="02020603050405020304" pitchFamily="18" charset="0"/>
-              </a:rPr>
-              <a:t>This table shows the best accuracy and average accuracy for our input images</a:t>
-            </a:r>
-            <a:r>
-              <a:rPr lang="en-US" dirty="0"/>
-              <a:t>.</a:t>
-            </a:r>
-          </a:p>
-          <a:p>
-            <a:endParaRPr lang="en-US" dirty="0"/>
-          </a:p>
-        </p:txBody>
-      </p:sp>
       <p:pic>
         <p:nvPicPr>
           <p:cNvPr id="4" name="Picture 3" descr="Caaaaaa.PNG"/>
@@ -14243,7 +14194,7 @@
         </p:blipFill>
         <p:spPr>
           <a:xfrm>
-            <a:off x="1216548" y="2618391"/>
+            <a:off x="1867304" y="2585125"/>
             <a:ext cx="8152589" cy="3356896"/>
           </a:xfrm>
           <a:prstGeom prst="rect">
@@ -14307,7 +14258,7 @@
                 <a:latin typeface="Times New Roman" panose="02020603050405020304" pitchFamily="18" charset="0"/>
                 <a:cs typeface="Times New Roman" panose="02020603050405020304" pitchFamily="18" charset="0"/>
               </a:rPr>
-              <a:t>Monday, July 6, 2020</a:t>
+              <a:t>Tuesday, July 7, 2020</a:t>
             </a:fld>
             <a:endParaRPr lang="en-US" dirty="0">
               <a:latin typeface="Times New Roman" panose="02020603050405020304" pitchFamily="18" charset="0"/>
@@ -14376,6 +14327,48 @@
               <a:t>19</a:t>
             </a:fld>
             <a:endParaRPr lang="en-US" dirty="0">
+              <a:latin typeface="Times New Roman" panose="02020603050405020304" pitchFamily="18" charset="0"/>
+              <a:cs typeface="Times New Roman" panose="02020603050405020304" pitchFamily="18" charset="0"/>
+            </a:endParaRPr>
+          </a:p>
+        </p:txBody>
+      </p:sp>
+      <p:sp>
+        <p:nvSpPr>
+          <p:cNvPr id="9" name="TextBox 8">
+            <a:extLst>
+              <a:ext uri="{FF2B5EF4-FFF2-40B4-BE49-F238E27FC236}">
+                <a16:creationId xmlns:a16="http://schemas.microsoft.com/office/drawing/2014/main" id="{E89C3E1E-10F6-4A41-8709-9224C77C7EDB}"/>
+              </a:ext>
+            </a:extLst>
+          </p:cNvPr>
+          <p:cNvSpPr txBox="1"/>
+          <p:nvPr/>
+        </p:nvSpPr>
+        <p:spPr>
+          <a:xfrm>
+            <a:off x="3347971" y="2023963"/>
+            <a:ext cx="5557018" cy="369332"/>
+          </a:xfrm>
+          <a:prstGeom prst="rect">
+            <a:avLst/>
+          </a:prstGeom>
+          <a:noFill/>
+        </p:spPr>
+        <p:txBody>
+          <a:bodyPr wrap="square" rtlCol="0">
+            <a:spAutoFit/>
+          </a:bodyPr>
+          <a:lstStyle/>
+          <a:p>
+            <a:r>
+              <a:rPr lang="en-US" dirty="0">
+                <a:latin typeface="Times New Roman" panose="02020603050405020304" pitchFamily="18" charset="0"/>
+                <a:cs typeface="Times New Roman" panose="02020603050405020304" pitchFamily="18" charset="0"/>
+              </a:rPr>
+              <a:t>Table 1: Accuracy and average accuracy of our system .</a:t>
+            </a:r>
+            <a:endParaRPr lang="en-US" sz="2400" dirty="0">
               <a:latin typeface="Times New Roman" panose="02020603050405020304" pitchFamily="18" charset="0"/>
               <a:cs typeface="Times New Roman" panose="02020603050405020304" pitchFamily="18" charset="0"/>
             </a:endParaRPr>
@@ -14817,7 +14810,7 @@
                 <a:latin typeface="Times New Roman" panose="02020603050405020304" pitchFamily="18" charset="0"/>
                 <a:cs typeface="Times New Roman" panose="02020603050405020304" pitchFamily="18" charset="0"/>
               </a:rPr>
-              <a:t>Monday, July 6, 2020</a:t>
+              <a:t>Tuesday, July 7, 2020</a:t>
             </a:fld>
             <a:endParaRPr lang="en-US" noProof="0" dirty="0">
               <a:latin typeface="Times New Roman" panose="02020603050405020304" pitchFamily="18" charset="0"/>
@@ -14948,46 +14941,6 @@
           </a:p>
         </p:txBody>
       </p:sp>
-      <p:sp>
-        <p:nvSpPr>
-          <p:cNvPr id="5" name="Content Placeholder 4"/>
-          <p:cNvSpPr>
-            <a:spLocks noGrp="1"/>
-          </p:cNvSpPr>
-          <p:nvPr>
-            <p:ph idx="1"/>
-          </p:nvPr>
-        </p:nvSpPr>
-        <p:spPr>
-          <a:xfrm>
-            <a:off x="1216547" y="2108201"/>
-            <a:ext cx="10291829" cy="4462416"/>
-          </a:xfrm>
-        </p:spPr>
-        <p:txBody>
-          <a:bodyPr/>
-          <a:lstStyle/>
-          <a:p>
-            <a:pPr>
-              <a:buNone/>
-            </a:pPr>
-            <a:r>
-              <a:rPr lang="en-US" dirty="0"/>
-              <a:t>    </a:t>
-            </a:r>
-            <a:r>
-              <a:rPr lang="en-US" dirty="0">
-                <a:latin typeface="Times New Roman" panose="02020603050405020304" pitchFamily="18" charset="0"/>
-                <a:cs typeface="Times New Roman" panose="02020603050405020304" pitchFamily="18" charset="0"/>
-              </a:rPr>
-              <a:t>Series1 shows line segmentation, series2 shows word segmentation and series3 shows character segmentation.</a:t>
-            </a:r>
-          </a:p>
-          <a:p>
-            <a:endParaRPr lang="en-US" dirty="0"/>
-          </a:p>
-        </p:txBody>
-      </p:sp>
       <p:pic>
         <p:nvPicPr>
           <p:cNvPr id="6" name="Picture 5" descr="gre.PNG"/>
@@ -15004,7 +14957,7 @@
         </p:blipFill>
         <p:spPr>
           <a:xfrm>
-            <a:off x="3648119" y="2567511"/>
+            <a:off x="3360230" y="1798471"/>
             <a:ext cx="6058746" cy="3543795"/>
           </a:xfrm>
           <a:prstGeom prst="rect">
@@ -15068,7 +15021,7 @@
                 <a:latin typeface="Times New Roman" panose="02020603050405020304" pitchFamily="18" charset="0"/>
                 <a:cs typeface="Times New Roman" panose="02020603050405020304" pitchFamily="18" charset="0"/>
               </a:rPr>
-              <a:t>Monday, July 6, 2020</a:t>
+              <a:t>Tuesday, July 7, 2020</a:t>
             </a:fld>
             <a:endParaRPr lang="en-US" dirty="0">
               <a:latin typeface="Times New Roman" panose="02020603050405020304" pitchFamily="18" charset="0"/>
@@ -15137,6 +15090,48 @@
               <a:t>20</a:t>
             </a:fld>
             <a:endParaRPr lang="en-US" dirty="0">
+              <a:latin typeface="Times New Roman" panose="02020603050405020304" pitchFamily="18" charset="0"/>
+              <a:cs typeface="Times New Roman" panose="02020603050405020304" pitchFamily="18" charset="0"/>
+            </a:endParaRPr>
+          </a:p>
+        </p:txBody>
+      </p:sp>
+      <p:sp>
+        <p:nvSpPr>
+          <p:cNvPr id="12" name="TextBox 11">
+            <a:extLst>
+              <a:ext uri="{FF2B5EF4-FFF2-40B4-BE49-F238E27FC236}">
+                <a16:creationId xmlns:a16="http://schemas.microsoft.com/office/drawing/2014/main" id="{407515A3-A3CB-4A4E-BB31-F5CC993070DA}"/>
+              </a:ext>
+            </a:extLst>
+          </p:cNvPr>
+          <p:cNvSpPr txBox="1"/>
+          <p:nvPr/>
+        </p:nvSpPr>
+        <p:spPr>
+          <a:xfrm>
+            <a:off x="634698" y="5709429"/>
+            <a:ext cx="11552222" cy="369332"/>
+          </a:xfrm>
+          <a:prstGeom prst="rect">
+            <a:avLst/>
+          </a:prstGeom>
+          <a:noFill/>
+        </p:spPr>
+        <p:txBody>
+          <a:bodyPr wrap="square" rtlCol="0">
+            <a:spAutoFit/>
+          </a:bodyPr>
+          <a:lstStyle/>
+          <a:p>
+            <a:r>
+              <a:rPr lang="en-US" dirty="0">
+                <a:latin typeface="Times New Roman" panose="02020603050405020304" pitchFamily="18" charset="0"/>
+                <a:cs typeface="Times New Roman" panose="02020603050405020304" pitchFamily="18" charset="0"/>
+              </a:rPr>
+              <a:t>Figure 12: Series1 shows line segmentation, series2 shows word segmentation and series3 shows character segmentation.</a:t>
+            </a:r>
+            <a:endParaRPr lang="en-US" sz="2400" dirty="0">
               <a:latin typeface="Times New Roman" panose="02020603050405020304" pitchFamily="18" charset="0"/>
               <a:cs typeface="Times New Roman" panose="02020603050405020304" pitchFamily="18" charset="0"/>
             </a:endParaRPr>
@@ -15316,7 +15311,7 @@
                 <a:latin typeface="Times New Roman" panose="02020603050405020304" pitchFamily="18" charset="0"/>
                 <a:cs typeface="Times New Roman" panose="02020603050405020304" pitchFamily="18" charset="0"/>
               </a:rPr>
-              <a:t>Monday, July 6, 2020</a:t>
+              <a:t>Tuesday, July 7, 2020</a:t>
             </a:fld>
             <a:endParaRPr lang="en-US" noProof="0" dirty="0">
               <a:latin typeface="Times New Roman" panose="02020603050405020304" pitchFamily="18" charset="0"/>
@@ -15541,7 +15536,7 @@
                 <a:latin typeface="Times New Roman" panose="02020603050405020304" pitchFamily="18" charset="0"/>
                 <a:cs typeface="Times New Roman" panose="02020603050405020304" pitchFamily="18" charset="0"/>
               </a:rPr>
-              <a:t>Monday, July 6, 2020</a:t>
+              <a:t>Tuesday, July 7, 2020</a:t>
             </a:fld>
             <a:endParaRPr lang="en-US" noProof="0" dirty="0">
               <a:latin typeface="Times New Roman" panose="02020603050405020304" pitchFamily="18" charset="0"/>
@@ -15768,7 +15763,7 @@
                 <a:latin typeface="Times New Roman" panose="02020603050405020304" pitchFamily="18" charset="0"/>
                 <a:cs typeface="Times New Roman" panose="02020603050405020304" pitchFamily="18" charset="0"/>
               </a:rPr>
-              <a:t>Monday, July 6, 2020</a:t>
+              <a:t>Tuesday, July 7, 2020</a:t>
             </a:fld>
             <a:endParaRPr lang="en-US" dirty="0">
               <a:latin typeface="Times New Roman" panose="02020603050405020304" pitchFamily="18" charset="0"/>
@@ -16002,7 +15997,21 @@
                 <a:latin typeface="Times New Roman" panose="02020603050405020304" pitchFamily="18" charset="0"/>
                 <a:cs typeface="Times New Roman" panose="02020603050405020304" pitchFamily="18" charset="0"/>
               </a:rPr>
-              <a:t>, B.B. Chaudhuri (1999) “Segmentation of Bangla handwritten text into characters by recursive contour following”, Proceedings of the Fifth International Conference on Document Analysis and Recognition. ICDAR '99: IEEE.</a:t>
+              <a:t>, B.B. Chaudhuri (1999) “</a:t>
+            </a:r>
+            <a:r>
+              <a:rPr lang="en-US" sz="2000" i="1" dirty="0">
+                <a:latin typeface="Times New Roman" panose="02020603050405020304" pitchFamily="18" charset="0"/>
+                <a:cs typeface="Times New Roman" panose="02020603050405020304" pitchFamily="18" charset="0"/>
+              </a:rPr>
+              <a:t>Segmentation of Bangla handwritten text into characters by recursive contour following</a:t>
+            </a:r>
+            <a:r>
+              <a:rPr lang="en-US" sz="2000" dirty="0">
+                <a:latin typeface="Times New Roman" panose="02020603050405020304" pitchFamily="18" charset="0"/>
+                <a:cs typeface="Times New Roman" panose="02020603050405020304" pitchFamily="18" charset="0"/>
+              </a:rPr>
+              <a:t>”, Proceedings of the Fifth International Conference on Document Analysis and Recognition. ICDAR '99: IEEE.</a:t>
             </a:r>
           </a:p>
           <a:p>
@@ -16060,21 +16069,21 @@
                 <a:latin typeface="Times New Roman" panose="02020603050405020304" pitchFamily="18" charset="0"/>
                 <a:cs typeface="Times New Roman" panose="02020603050405020304" pitchFamily="18" charset="0"/>
               </a:rPr>
-              <a:t> Zaman, “Segmenting Bangla Text for Optical </a:t>
-            </a:r>
-            <a:r>
-              <a:rPr lang="en-US" sz="2000" dirty="0" err="1">
-                <a:latin typeface="Times New Roman" panose="02020603050405020304" pitchFamily="18" charset="0"/>
-                <a:cs typeface="Times New Roman" panose="02020603050405020304" pitchFamily="18" charset="0"/>
-              </a:rPr>
-              <a:t>Recognition,”ICCIT</a:t>
+              <a:t> Zaman, “</a:t>
+            </a:r>
+            <a:r>
+              <a:rPr lang="en-US" sz="2000" i="1" dirty="0">
+                <a:latin typeface="Times New Roman" panose="02020603050405020304" pitchFamily="18" charset="0"/>
+                <a:cs typeface="Times New Roman" panose="02020603050405020304" pitchFamily="18" charset="0"/>
+              </a:rPr>
+              <a:t>Segmenting Bangla Text for Optical Recognition</a:t>
             </a:r>
             <a:r>
               <a:rPr lang="en-US" sz="2000" dirty="0">
                 <a:latin typeface="Times New Roman" panose="02020603050405020304" pitchFamily="18" charset="0"/>
                 <a:cs typeface="Times New Roman" panose="02020603050405020304" pitchFamily="18" charset="0"/>
               </a:rPr>
-              <a:t>, 2007. ISBN: 978-1-4244-1550-2, pp. 1-6.</a:t>
+              <a:t>, ”ICCIT, 2007. ISBN: 978-1-4244-1550-2, pp. 1-6.</a:t>
             </a:r>
           </a:p>
           <a:p>
@@ -16135,7 +16144,7 @@
                 <a:latin typeface="Times New Roman" panose="02020603050405020304" pitchFamily="18" charset="0"/>
                 <a:cs typeface="Times New Roman" panose="02020603050405020304" pitchFamily="18" charset="0"/>
               </a:rPr>
-              <a:t>Monday, July 6, 2020</a:t>
+              <a:t>Tuesday, July 7, 2020</a:t>
             </a:fld>
             <a:endParaRPr lang="en-US" dirty="0">
               <a:latin typeface="Times New Roman" panose="02020603050405020304" pitchFamily="18" charset="0"/>
@@ -16449,6 +16458,7 @@
           </a:bodyPr>
           <a:lstStyle/>
           <a:p>
+            <a:pPr algn="ctr"/>
             <a:r>
               <a:rPr lang="en-US" sz="9600" dirty="0">
                 <a:solidFill>
@@ -16545,7 +16555,7 @@
           </a:bodyPr>
           <a:lstStyle/>
           <a:p>
-            <a:pPr marL="0" indent="0">
+            <a:pPr marL="0" indent="0" algn="ctr">
               <a:buNone/>
             </a:pPr>
             <a:r>
@@ -16583,8 +16593,8 @@
         </p:blipFill>
         <p:spPr>
           <a:xfrm>
-            <a:off x="11094720" y="0"/>
-            <a:ext cx="1092200" cy="1184617"/>
+            <a:off x="4948891" y="338000"/>
+            <a:ext cx="2429684" cy="2635273"/>
           </a:xfrm>
           <a:prstGeom prst="rect">
             <a:avLst/>
@@ -16617,7 +16627,7 @@
                 <a:latin typeface="Times New Roman" panose="02020603050405020304" pitchFamily="18" charset="0"/>
                 <a:cs typeface="Times New Roman" panose="02020603050405020304" pitchFamily="18" charset="0"/>
               </a:rPr>
-              <a:t>Monday, July 6, 2020</a:t>
+              <a:t>Tuesday, July 7, 2020</a:t>
             </a:fld>
             <a:endParaRPr lang="en-US" dirty="0">
               <a:latin typeface="Times New Roman" panose="02020603050405020304" pitchFamily="18" charset="0"/>
@@ -16873,7 +16883,7 @@
                 <a:latin typeface="Times New Roman" panose="02020603050405020304" pitchFamily="18" charset="0"/>
                 <a:cs typeface="Times New Roman" panose="02020603050405020304" pitchFamily="18" charset="0"/>
               </a:rPr>
-              <a:t>Monday, July 6, 2020</a:t>
+              <a:t>Tuesday, July 7, 2020</a:t>
             </a:fld>
             <a:endParaRPr lang="en-US" noProof="0" dirty="0">
               <a:latin typeface="Times New Roman" panose="02020603050405020304" pitchFamily="18" charset="0"/>
@@ -17139,7 +17149,7 @@
                 <a:latin typeface="Times New Roman" panose="02020603050405020304" pitchFamily="18" charset="0"/>
                 <a:cs typeface="Times New Roman" panose="02020603050405020304" pitchFamily="18" charset="0"/>
               </a:rPr>
-              <a:t>Monday, July 6, 2020</a:t>
+              <a:t>Tuesday, July 7, 2020</a:t>
             </a:fld>
             <a:endParaRPr lang="en-US" noProof="0" dirty="0">
               <a:latin typeface="Times New Roman" panose="02020603050405020304" pitchFamily="18" charset="0"/>
@@ -17382,7 +17392,7 @@
                 <a:latin typeface="Times New Roman" panose="02020603050405020304" pitchFamily="18" charset="0"/>
                 <a:cs typeface="Times New Roman" panose="02020603050405020304" pitchFamily="18" charset="0"/>
               </a:rPr>
-              <a:t>Monday, July 6, 2020</a:t>
+              <a:t>Tuesday, July 7, 2020</a:t>
             </a:fld>
             <a:endParaRPr lang="en-US" noProof="0" dirty="0">
               <a:latin typeface="Times New Roman" panose="02020603050405020304" pitchFamily="18" charset="0"/>
@@ -17675,7 +17685,7 @@
                 <a:latin typeface="Times New Roman" panose="02020603050405020304" pitchFamily="18" charset="0"/>
                 <a:cs typeface="Times New Roman" panose="02020603050405020304" pitchFamily="18" charset="0"/>
               </a:rPr>
-              <a:t>Monday, July 6, 2020</a:t>
+              <a:t>Tuesday, July 7, 2020</a:t>
             </a:fld>
             <a:endParaRPr lang="en-US" noProof="0" dirty="0">
               <a:latin typeface="Times New Roman" panose="02020603050405020304" pitchFamily="18" charset="0"/>
@@ -17951,7 +17961,7 @@
                 <a:latin typeface="Times New Roman" panose="02020603050405020304" pitchFamily="18" charset="0"/>
                 <a:cs typeface="Times New Roman" panose="02020603050405020304" pitchFamily="18" charset="0"/>
               </a:rPr>
-              <a:t>Monday, July 6, 2020</a:t>
+              <a:t>Tuesday, July 7, 2020</a:t>
             </a:fld>
             <a:endParaRPr lang="en-US" dirty="0">
               <a:latin typeface="Times New Roman" panose="02020603050405020304" pitchFamily="18" charset="0"/>
@@ -18830,7 +18840,7 @@
                 <a:latin typeface="Times New Roman" panose="02020603050405020304" pitchFamily="18" charset="0"/>
                 <a:cs typeface="Times New Roman" panose="02020603050405020304" pitchFamily="18" charset="0"/>
               </a:rPr>
-              <a:t>Monday, July 6, 2020</a:t>
+              <a:t>Tuesday, July 7, 2020</a:t>
             </a:fld>
             <a:endParaRPr lang="en-US" dirty="0">
               <a:latin typeface="Times New Roman" panose="02020603050405020304" pitchFamily="18" charset="0"/>
@@ -19477,7 +19487,7 @@
                 <a:latin typeface="Times New Roman" panose="02020603050405020304" pitchFamily="18" charset="0"/>
                 <a:cs typeface="Times New Roman" panose="02020603050405020304" pitchFamily="18" charset="0"/>
               </a:rPr>
-              <a:t>Monday, July 6, 2020</a:t>
+              <a:t>Tuesday, July 7, 2020</a:t>
             </a:fld>
             <a:endParaRPr lang="en-US" dirty="0">
               <a:latin typeface="Times New Roman" panose="02020603050405020304" pitchFamily="18" charset="0"/>
@@ -20448,15 +20458,6 @@
 </file>
 
 <file path=customXml/item2.xml><?xml version="1.0" encoding="utf-8"?>
-<?mso-contentType ?>
-<FormTemplates xmlns="http://schemas.microsoft.com/sharepoint/v3/contenttype/forms">
-  <Display>DocumentLibraryForm</Display>
-  <Edit>DocumentLibraryForm</Edit>
-  <New>DocumentLibraryForm</New>
-</FormTemplates>
-</file>
-
-<file path=customXml/item3.xml><?xml version="1.0" encoding="utf-8"?>
 <ct:contentTypeSchema xmlns:ct="http://schemas.microsoft.com/office/2006/metadata/contentType" xmlns:ma="http://schemas.microsoft.com/office/2006/metadata/properties/metaAttributes" ct:_="" ma:_="" ma:contentTypeName="Document" ma:contentTypeID="0x01010079F111ED35F8CC479449609E8A0923A6" ma:contentTypeVersion="12" ma:contentTypeDescription="Create a new document." ma:contentTypeScope="" ma:versionID="fa6e671f1cd7e4d96ff9652be322dd5e">
   <xsd:schema xmlns:xsd="http://www.w3.org/2001/XMLSchema" xmlns:xs="http://www.w3.org/2001/XMLSchema" xmlns:p="http://schemas.microsoft.com/office/2006/metadata/properties" xmlns:ns2="71af3243-3dd4-4a8d-8c0d-dd76da1f02a5" xmlns:ns3="16c05727-aa75-4e4a-9b5f-8a80a1165891" targetNamespace="http://schemas.microsoft.com/office/2006/metadata/properties" ma:root="true" ma:fieldsID="4e2496f70b101db0b8013f30a071bbf7" ns2:_="" ns3:_="">
     <xsd:import namespace="71af3243-3dd4-4a8d-8c0d-dd76da1f02a5"/>
@@ -20677,6 +20678,15 @@
 </ct:contentTypeSchema>
 </file>
 
+<file path=customXml/item3.xml><?xml version="1.0" encoding="utf-8"?>
+<?mso-contentType ?>
+<FormTemplates xmlns="http://schemas.microsoft.com/sharepoint/v3/contenttype/forms">
+  <Display>DocumentLibraryForm</Display>
+  <Edit>DocumentLibraryForm</Edit>
+  <New>DocumentLibraryForm</New>
+</FormTemplates>
+</file>
+
 <file path=customXml/itemProps1.xml><?xml version="1.0" encoding="utf-8"?>
 <ds:datastoreItem xmlns:ds="http://schemas.openxmlformats.org/officeDocument/2006/customXml" ds:itemID="{A4E879E6-8FFE-4154-8F2A-F7518B89B376}">
   <ds:schemaRefs>
@@ -20688,14 +20698,6 @@
 </file>
 
 <file path=customXml/itemProps2.xml><?xml version="1.0" encoding="utf-8"?>
-<ds:datastoreItem xmlns:ds="http://schemas.openxmlformats.org/officeDocument/2006/customXml" ds:itemID="{7E0A2CB4-6869-426F-8BC4-A32C90CBE263}">
-  <ds:schemaRefs>
-    <ds:schemaRef ds:uri="http://schemas.microsoft.com/sharepoint/v3/contenttype/forms"/>
-  </ds:schemaRefs>
-</ds:datastoreItem>
-</file>
-
-<file path=customXml/itemProps3.xml><?xml version="1.0" encoding="utf-8"?>
 <ds:datastoreItem xmlns:ds="http://schemas.openxmlformats.org/officeDocument/2006/customXml" ds:itemID="{A941CA7C-A0BF-44EF-B2E5-7539C3B9B0B6}">
   <ds:schemaRefs>
     <ds:schemaRef ds:uri="http://schemas.microsoft.com/office/2006/metadata/contentType"/>
@@ -20712,4 +20714,12 @@
     <ds:schemaRef ds:uri="http://schemas.microsoft.com/internal/obd"/>
   </ds:schemaRefs>
 </ds:datastoreItem>
+</file>
+
+<file path=customXml/itemProps3.xml><?xml version="1.0" encoding="utf-8"?>
+<ds:datastoreItem xmlns:ds="http://schemas.openxmlformats.org/officeDocument/2006/customXml" ds:itemID="{7E0A2CB4-6869-426F-8BC4-A32C90CBE263}">
+  <ds:schemaRefs>
+    <ds:schemaRef ds:uri="http://schemas.microsoft.com/sharepoint/v3/contenttype/forms"/>
+  </ds:schemaRefs>
+</ds:datastoreItem>
 </file>
--- a/book/puja.pptx
+++ b/book/puja.pptx
@@ -5,10 +5,10 @@
     <p:sldMasterId id="2147483717" r:id="rId4"/>
   </p:sldMasterIdLst>
   <p:notesMasterIdLst>
-    <p:notesMasterId r:id="rId30"/>
+    <p:notesMasterId r:id="rId32"/>
   </p:notesMasterIdLst>
   <p:handoutMasterIdLst>
-    <p:handoutMasterId r:id="rId31"/>
+    <p:handoutMasterId r:id="rId33"/>
   </p:handoutMasterIdLst>
   <p:sldIdLst>
     <p:sldId id="258" r:id="rId5"/>
@@ -30,12 +30,14 @@
     <p:sldId id="306" r:id="rId21"/>
     <p:sldId id="307" r:id="rId22"/>
     <p:sldId id="310" r:id="rId23"/>
-    <p:sldId id="311" r:id="rId24"/>
-    <p:sldId id="312" r:id="rId25"/>
-    <p:sldId id="297" r:id="rId26"/>
-    <p:sldId id="313" r:id="rId27"/>
-    <p:sldId id="308" r:id="rId28"/>
-    <p:sldId id="290" r:id="rId29"/>
+    <p:sldId id="314" r:id="rId24"/>
+    <p:sldId id="311" r:id="rId25"/>
+    <p:sldId id="315" r:id="rId26"/>
+    <p:sldId id="312" r:id="rId27"/>
+    <p:sldId id="297" r:id="rId28"/>
+    <p:sldId id="313" r:id="rId29"/>
+    <p:sldId id="308" r:id="rId30"/>
+    <p:sldId id="290" r:id="rId31"/>
   </p:sldIdLst>
   <p:sldSz cx="12192000" cy="6858000"/>
   <p:notesSz cx="6858000" cy="9144000"/>
@@ -14180,7 +14182,13 @@
       </p:sp>
       <p:pic>
         <p:nvPicPr>
-          <p:cNvPr id="4" name="Picture 3" descr="Caaaaaa.PNG"/>
+          <p:cNvPr id="5" name="Picture 4">
+            <a:extLst>
+              <a:ext uri="{FF2B5EF4-FFF2-40B4-BE49-F238E27FC236}">
+                <a16:creationId xmlns:a16="http://schemas.microsoft.com/office/drawing/2014/main" id="{58BE8302-4C4D-4C05-8AC1-D85DE9FBC8FD}"/>
+              </a:ext>
+            </a:extLst>
+          </p:cNvPr>
           <p:cNvPicPr>
             <a:picLocks noChangeAspect="1"/>
           </p:cNvPicPr>
@@ -14194,36 +14202,6 @@
         </p:blipFill>
         <p:spPr>
           <a:xfrm>
-            <a:off x="1867304" y="2585125"/>
-            <a:ext cx="8152589" cy="3356896"/>
-          </a:xfrm>
-          <a:prstGeom prst="rect">
-            <a:avLst/>
-          </a:prstGeom>
-        </p:spPr>
-      </p:pic>
-      <p:pic>
-        <p:nvPicPr>
-          <p:cNvPr id="5" name="Picture 4">
-            <a:extLst>
-              <a:ext uri="{FF2B5EF4-FFF2-40B4-BE49-F238E27FC236}">
-                <a16:creationId xmlns:a16="http://schemas.microsoft.com/office/drawing/2014/main" id="{58BE8302-4C4D-4C05-8AC1-D85DE9FBC8FD}"/>
-              </a:ext>
-            </a:extLst>
-          </p:cNvPr>
-          <p:cNvPicPr>
-            <a:picLocks noChangeAspect="1"/>
-          </p:cNvPicPr>
-          <p:nvPr/>
-        </p:nvPicPr>
-        <p:blipFill>
-          <a:blip r:embed="rId3"/>
-          <a:stretch>
-            <a:fillRect/>
-          </a:stretch>
-        </p:blipFill>
-        <p:spPr>
-          <a:xfrm>
             <a:off x="11094720" y="0"/>
             <a:ext cx="1092200" cy="1184617"/>
           </a:xfrm>
@@ -14347,8 +14325,8 @@
         </p:nvSpPr>
         <p:spPr>
           <a:xfrm>
-            <a:off x="3347971" y="2023963"/>
-            <a:ext cx="5557018" cy="369332"/>
+            <a:off x="1867304" y="2057511"/>
+            <a:ext cx="8272577" cy="369332"/>
           </a:xfrm>
           <a:prstGeom prst="rect">
             <a:avLst/>
@@ -14366,7 +14344,7 @@
                 <a:latin typeface="Times New Roman" panose="02020603050405020304" pitchFamily="18" charset="0"/>
                 <a:cs typeface="Times New Roman" panose="02020603050405020304" pitchFamily="18" charset="0"/>
               </a:rPr>
-              <a:t>Table 1: Accuracy and average accuracy of our system .</a:t>
+              <a:t>Table 1: Overall best accuracy and average accuracy of our system on printed script.</a:t>
             </a:r>
             <a:endParaRPr lang="en-US" sz="2400" dirty="0">
               <a:latin typeface="Times New Roman" panose="02020603050405020304" pitchFamily="18" charset="0"/>
@@ -14375,6 +14353,35 @@
           </a:p>
         </p:txBody>
       </p:sp>
+      <p:pic>
+        <p:nvPicPr>
+          <p:cNvPr id="3" name="Picture 2">
+            <a:extLst>
+              <a:ext uri="{FF2B5EF4-FFF2-40B4-BE49-F238E27FC236}">
+                <a16:creationId xmlns:a16="http://schemas.microsoft.com/office/drawing/2014/main" id="{6AFDE34D-06B0-4864-94E0-53956DCF2899}"/>
+              </a:ext>
+            </a:extLst>
+          </p:cNvPr>
+          <p:cNvPicPr>
+            <a:picLocks noChangeAspect="1"/>
+          </p:cNvPicPr>
+          <p:nvPr/>
+        </p:nvPicPr>
+        <p:blipFill rotWithShape="1">
+          <a:blip r:embed="rId3"/>
+          <a:srcRect t="6521"/>
+          <a:stretch/>
+        </p:blipFill>
+        <p:spPr>
+          <a:xfrm>
+            <a:off x="1073218" y="2842788"/>
+            <a:ext cx="10408010" cy="2670772"/>
+          </a:xfrm>
+          <a:prstGeom prst="rect">
+            <a:avLst/>
+          </a:prstGeom>
+        </p:spPr>
+      </p:pic>
     </p:spTree>
   </p:cSld>
   <p:clrMapOvr>
@@ -14936,14 +14943,20 @@
                 <a:latin typeface="Times New Roman" panose="02020603050405020304" pitchFamily="18" charset="0"/>
                 <a:cs typeface="Times New Roman" panose="02020603050405020304" pitchFamily="18" charset="0"/>
               </a:rPr>
-              <a:t>Accuracy Graph</a:t>
+              <a:t>Accuracy</a:t>
             </a:r>
           </a:p>
         </p:txBody>
       </p:sp>
       <p:pic>
         <p:nvPicPr>
-          <p:cNvPr id="6" name="Picture 5" descr="gre.PNG"/>
+          <p:cNvPr id="5" name="Picture 4">
+            <a:extLst>
+              <a:ext uri="{FF2B5EF4-FFF2-40B4-BE49-F238E27FC236}">
+                <a16:creationId xmlns:a16="http://schemas.microsoft.com/office/drawing/2014/main" id="{58BE8302-4C4D-4C05-8AC1-D85DE9FBC8FD}"/>
+              </a:ext>
+            </a:extLst>
+          </p:cNvPr>
           <p:cNvPicPr>
             <a:picLocks noChangeAspect="1"/>
           </p:cNvPicPr>
@@ -14957,20 +14970,163 @@
         </p:blipFill>
         <p:spPr>
           <a:xfrm>
-            <a:off x="3360230" y="1798471"/>
-            <a:ext cx="6058746" cy="3543795"/>
+            <a:off x="11094720" y="0"/>
+            <a:ext cx="1092200" cy="1184617"/>
           </a:xfrm>
           <a:prstGeom prst="rect">
             <a:avLst/>
           </a:prstGeom>
         </p:spPr>
       </p:pic>
+      <p:sp>
+        <p:nvSpPr>
+          <p:cNvPr id="6" name="Date Placeholder 5">
+            <a:extLst>
+              <a:ext uri="{FF2B5EF4-FFF2-40B4-BE49-F238E27FC236}">
+                <a16:creationId xmlns:a16="http://schemas.microsoft.com/office/drawing/2014/main" id="{0A2F0D1A-2450-44A0-87BA-F73A0577214F}"/>
+              </a:ext>
+            </a:extLst>
+          </p:cNvPr>
+          <p:cNvSpPr>
+            <a:spLocks noGrp="1"/>
+          </p:cNvSpPr>
+          <p:nvPr>
+            <p:ph type="dt" sz="half" idx="10"/>
+          </p:nvPr>
+        </p:nvSpPr>
+        <p:spPr/>
+        <p:txBody>
+          <a:bodyPr/>
+          <a:lstStyle/>
+          <a:p>
+            <a:fld id="{F116073E-4497-4542-884F-6850C38342DB}" type="datetime2">
+              <a:rPr lang="en-US" smtClean="0">
+                <a:latin typeface="Times New Roman" panose="02020603050405020304" pitchFamily="18" charset="0"/>
+                <a:cs typeface="Times New Roman" panose="02020603050405020304" pitchFamily="18" charset="0"/>
+              </a:rPr>
+              <a:t>Tuesday, July 7, 2020</a:t>
+            </a:fld>
+            <a:endParaRPr lang="en-US" dirty="0">
+              <a:latin typeface="Times New Roman" panose="02020603050405020304" pitchFamily="18" charset="0"/>
+              <a:cs typeface="Times New Roman" panose="02020603050405020304" pitchFamily="18" charset="0"/>
+            </a:endParaRPr>
+          </a:p>
+        </p:txBody>
+      </p:sp>
+      <p:sp>
+        <p:nvSpPr>
+          <p:cNvPr id="7" name="Footer Placeholder 6">
+            <a:extLst>
+              <a:ext uri="{FF2B5EF4-FFF2-40B4-BE49-F238E27FC236}">
+                <a16:creationId xmlns:a16="http://schemas.microsoft.com/office/drawing/2014/main" id="{8D2EAB1B-FD5D-4A64-83EE-0E2A18F4D392}"/>
+              </a:ext>
+            </a:extLst>
+          </p:cNvPr>
+          <p:cNvSpPr>
+            <a:spLocks noGrp="1"/>
+          </p:cNvSpPr>
+          <p:nvPr>
+            <p:ph type="ftr" sz="quarter" idx="11"/>
+          </p:nvPr>
+        </p:nvSpPr>
+        <p:spPr/>
+        <p:txBody>
+          <a:bodyPr/>
+          <a:lstStyle/>
+          <a:p>
+            <a:r>
+              <a:rPr lang="en-US" dirty="0">
+                <a:latin typeface="Times New Roman" panose="02020603050405020304" pitchFamily="18" charset="0"/>
+                <a:cs typeface="Times New Roman" panose="02020603050405020304" pitchFamily="18" charset="0"/>
+              </a:rPr>
+              <a:t>Handwritten and printed Bengali script character segmentation using morphological analysis</a:t>
+            </a:r>
+          </a:p>
+        </p:txBody>
+      </p:sp>
+      <p:sp>
+        <p:nvSpPr>
+          <p:cNvPr id="8" name="Slide Number Placeholder 7">
+            <a:extLst>
+              <a:ext uri="{FF2B5EF4-FFF2-40B4-BE49-F238E27FC236}">
+                <a16:creationId xmlns:a16="http://schemas.microsoft.com/office/drawing/2014/main" id="{7D42B2E9-A572-4F3E-BD94-485044084831}"/>
+              </a:ext>
+            </a:extLst>
+          </p:cNvPr>
+          <p:cNvSpPr>
+            <a:spLocks noGrp="1"/>
+          </p:cNvSpPr>
+          <p:nvPr>
+            <p:ph type="sldNum" sz="quarter" idx="12"/>
+          </p:nvPr>
+        </p:nvSpPr>
+        <p:spPr/>
+        <p:txBody>
+          <a:bodyPr/>
+          <a:lstStyle/>
+          <a:p>
+            <a:fld id="{3A98EE3D-8CD1-4C3F-BD1C-C98C9596463C}" type="slidenum">
+              <a:rPr lang="en-US" smtClean="0">
+                <a:latin typeface="Times New Roman" panose="02020603050405020304" pitchFamily="18" charset="0"/>
+                <a:cs typeface="Times New Roman" panose="02020603050405020304" pitchFamily="18" charset="0"/>
+              </a:rPr>
+              <a:t>20</a:t>
+            </a:fld>
+            <a:endParaRPr lang="en-US" dirty="0">
+              <a:latin typeface="Times New Roman" panose="02020603050405020304" pitchFamily="18" charset="0"/>
+              <a:cs typeface="Times New Roman" panose="02020603050405020304" pitchFamily="18" charset="0"/>
+            </a:endParaRPr>
+          </a:p>
+        </p:txBody>
+      </p:sp>
+      <p:sp>
+        <p:nvSpPr>
+          <p:cNvPr id="9" name="TextBox 8">
+            <a:extLst>
+              <a:ext uri="{FF2B5EF4-FFF2-40B4-BE49-F238E27FC236}">
+                <a16:creationId xmlns:a16="http://schemas.microsoft.com/office/drawing/2014/main" id="{E89C3E1E-10F6-4A41-8709-9224C77C7EDB}"/>
+              </a:ext>
+            </a:extLst>
+          </p:cNvPr>
+          <p:cNvSpPr txBox="1"/>
+          <p:nvPr/>
+        </p:nvSpPr>
+        <p:spPr>
+          <a:xfrm>
+            <a:off x="1984519" y="2087661"/>
+            <a:ext cx="8283921" cy="369332"/>
+          </a:xfrm>
+          <a:prstGeom prst="rect">
+            <a:avLst/>
+          </a:prstGeom>
+          <a:noFill/>
+        </p:spPr>
+        <p:txBody>
+          <a:bodyPr wrap="square" rtlCol="0">
+            <a:spAutoFit/>
+          </a:bodyPr>
+          <a:lstStyle/>
+          <a:p>
+            <a:r>
+              <a:rPr lang="en-US" dirty="0">
+                <a:latin typeface="Times New Roman" panose="02020603050405020304" pitchFamily="18" charset="0"/>
+                <a:cs typeface="Times New Roman" panose="02020603050405020304" pitchFamily="18" charset="0"/>
+              </a:rPr>
+              <a:t>Table 2: Overall accuracy and average accuracy of our system of handwritten script.</a:t>
+            </a:r>
+            <a:endParaRPr lang="en-US" sz="2400" dirty="0">
+              <a:latin typeface="Times New Roman" panose="02020603050405020304" pitchFamily="18" charset="0"/>
+              <a:cs typeface="Times New Roman" panose="02020603050405020304" pitchFamily="18" charset="0"/>
+            </a:endParaRPr>
+          </a:p>
+        </p:txBody>
+      </p:sp>
       <p:pic>
         <p:nvPicPr>
-          <p:cNvPr id="7" name="Picture 6">
-            <a:extLst>
-              <a:ext uri="{FF2B5EF4-FFF2-40B4-BE49-F238E27FC236}">
-                <a16:creationId xmlns:a16="http://schemas.microsoft.com/office/drawing/2014/main" id="{E6EDAF98-BA18-422B-B858-6A3E455DF164}"/>
+          <p:cNvPr id="3" name="Picture 2">
+            <a:extLst>
+              <a:ext uri="{FF2B5EF4-FFF2-40B4-BE49-F238E27FC236}">
+                <a16:creationId xmlns:a16="http://schemas.microsoft.com/office/drawing/2014/main" id="{C1796475-A627-4661-B026-B4390F1AD5A4}"/>
               </a:ext>
             </a:extLst>
           </p:cNvPr>
@@ -14987,158 +15143,20 @@
         </p:blipFill>
         <p:spPr>
           <a:xfrm>
-            <a:off x="11094720" y="0"/>
-            <a:ext cx="1092200" cy="1184617"/>
+            <a:off x="807819" y="2856800"/>
+            <a:ext cx="10576361" cy="2820899"/>
           </a:xfrm>
           <a:prstGeom prst="rect">
             <a:avLst/>
           </a:prstGeom>
         </p:spPr>
       </p:pic>
-      <p:sp>
-        <p:nvSpPr>
-          <p:cNvPr id="3" name="Date Placeholder 2">
-            <a:extLst>
-              <a:ext uri="{FF2B5EF4-FFF2-40B4-BE49-F238E27FC236}">
-                <a16:creationId xmlns:a16="http://schemas.microsoft.com/office/drawing/2014/main" id="{D6B049A7-94C4-4D6E-8E6A-CE10D9973F64}"/>
-              </a:ext>
-            </a:extLst>
-          </p:cNvPr>
-          <p:cNvSpPr>
-            <a:spLocks noGrp="1"/>
-          </p:cNvSpPr>
-          <p:nvPr>
-            <p:ph type="dt" sz="half" idx="10"/>
-          </p:nvPr>
-        </p:nvSpPr>
-        <p:spPr/>
-        <p:txBody>
-          <a:bodyPr/>
-          <a:lstStyle/>
-          <a:p>
-            <a:fld id="{B77F70DC-817D-44CD-A54C-AF3C30502533}" type="datetime2">
-              <a:rPr lang="en-US" smtClean="0">
-                <a:latin typeface="Times New Roman" panose="02020603050405020304" pitchFamily="18" charset="0"/>
-                <a:cs typeface="Times New Roman" panose="02020603050405020304" pitchFamily="18" charset="0"/>
-              </a:rPr>
-              <a:t>Tuesday, July 7, 2020</a:t>
-            </a:fld>
-            <a:endParaRPr lang="en-US" dirty="0">
-              <a:latin typeface="Times New Roman" panose="02020603050405020304" pitchFamily="18" charset="0"/>
-              <a:cs typeface="Times New Roman" panose="02020603050405020304" pitchFamily="18" charset="0"/>
-            </a:endParaRPr>
-          </a:p>
-        </p:txBody>
-      </p:sp>
-      <p:sp>
-        <p:nvSpPr>
-          <p:cNvPr id="4" name="Footer Placeholder 3">
-            <a:extLst>
-              <a:ext uri="{FF2B5EF4-FFF2-40B4-BE49-F238E27FC236}">
-                <a16:creationId xmlns:a16="http://schemas.microsoft.com/office/drawing/2014/main" id="{A1811881-C655-4425-AA38-2137AC7EF725}"/>
-              </a:ext>
-            </a:extLst>
-          </p:cNvPr>
-          <p:cNvSpPr>
-            <a:spLocks noGrp="1"/>
-          </p:cNvSpPr>
-          <p:nvPr>
-            <p:ph type="ftr" sz="quarter" idx="11"/>
-          </p:nvPr>
-        </p:nvSpPr>
-        <p:spPr/>
-        <p:txBody>
-          <a:bodyPr/>
-          <a:lstStyle/>
-          <a:p>
-            <a:r>
-              <a:rPr lang="en-US" dirty="0">
-                <a:latin typeface="Times New Roman" panose="02020603050405020304" pitchFamily="18" charset="0"/>
-                <a:cs typeface="Times New Roman" panose="02020603050405020304" pitchFamily="18" charset="0"/>
-              </a:rPr>
-              <a:t>Handwritten and printed Bengali script character segmentation using morphological analysis</a:t>
-            </a:r>
-          </a:p>
-        </p:txBody>
-      </p:sp>
-      <p:sp>
-        <p:nvSpPr>
-          <p:cNvPr id="8" name="Slide Number Placeholder 7">
-            <a:extLst>
-              <a:ext uri="{FF2B5EF4-FFF2-40B4-BE49-F238E27FC236}">
-                <a16:creationId xmlns:a16="http://schemas.microsoft.com/office/drawing/2014/main" id="{049ACDF1-AAE1-44C5-9936-EC137AB4B81F}"/>
-              </a:ext>
-            </a:extLst>
-          </p:cNvPr>
-          <p:cNvSpPr>
-            <a:spLocks noGrp="1"/>
-          </p:cNvSpPr>
-          <p:nvPr>
-            <p:ph type="sldNum" sz="quarter" idx="12"/>
-          </p:nvPr>
-        </p:nvSpPr>
-        <p:spPr/>
-        <p:txBody>
-          <a:bodyPr/>
-          <a:lstStyle/>
-          <a:p>
-            <a:fld id="{3A98EE3D-8CD1-4C3F-BD1C-C98C9596463C}" type="slidenum">
-              <a:rPr lang="en-US" smtClean="0">
-                <a:latin typeface="Times New Roman" panose="02020603050405020304" pitchFamily="18" charset="0"/>
-                <a:cs typeface="Times New Roman" panose="02020603050405020304" pitchFamily="18" charset="0"/>
-              </a:rPr>
-              <a:t>20</a:t>
-            </a:fld>
-            <a:endParaRPr lang="en-US" dirty="0">
-              <a:latin typeface="Times New Roman" panose="02020603050405020304" pitchFamily="18" charset="0"/>
-              <a:cs typeface="Times New Roman" panose="02020603050405020304" pitchFamily="18" charset="0"/>
-            </a:endParaRPr>
-          </a:p>
-        </p:txBody>
-      </p:sp>
-      <p:sp>
-        <p:nvSpPr>
-          <p:cNvPr id="12" name="TextBox 11">
-            <a:extLst>
-              <a:ext uri="{FF2B5EF4-FFF2-40B4-BE49-F238E27FC236}">
-                <a16:creationId xmlns:a16="http://schemas.microsoft.com/office/drawing/2014/main" id="{407515A3-A3CB-4A4E-BB31-F5CC993070DA}"/>
-              </a:ext>
-            </a:extLst>
-          </p:cNvPr>
-          <p:cNvSpPr txBox="1"/>
-          <p:nvPr/>
-        </p:nvSpPr>
-        <p:spPr>
-          <a:xfrm>
-            <a:off x="634698" y="5709429"/>
-            <a:ext cx="11552222" cy="369332"/>
-          </a:xfrm>
-          <a:prstGeom prst="rect">
-            <a:avLst/>
-          </a:prstGeom>
-          <a:noFill/>
-        </p:spPr>
-        <p:txBody>
-          <a:bodyPr wrap="square" rtlCol="0">
-            <a:spAutoFit/>
-          </a:bodyPr>
-          <a:lstStyle/>
-          <a:p>
-            <a:r>
-              <a:rPr lang="en-US" dirty="0">
-                <a:latin typeface="Times New Roman" panose="02020603050405020304" pitchFamily="18" charset="0"/>
-                <a:cs typeface="Times New Roman" panose="02020603050405020304" pitchFamily="18" charset="0"/>
-              </a:rPr>
-              <a:t>Figure 12: Series1 shows line segmentation, series2 shows word segmentation and series3 shows character segmentation.</a:t>
-            </a:r>
-            <a:endParaRPr lang="en-US" sz="2400" dirty="0">
-              <a:latin typeface="Times New Roman" panose="02020603050405020304" pitchFamily="18" charset="0"/>
-              <a:cs typeface="Times New Roman" panose="02020603050405020304" pitchFamily="18" charset="0"/>
-            </a:endParaRPr>
-          </a:p>
-        </p:txBody>
-      </p:sp>
     </p:spTree>
+    <p:extLst>
+      <p:ext uri="{BB962C8B-B14F-4D97-AF65-F5344CB8AC3E}">
+        <p14:creationId xmlns:p14="http://schemas.microsoft.com/office/powerpoint/2010/main" val="3041381415"/>
+      </p:ext>
+    </p:extLst>
   </p:cSld>
   <p:clrMapOvr>
     <a:masterClrMapping/>
@@ -15165,12 +15183,12 @@
       </p:grpSpPr>
       <p:sp>
         <p:nvSpPr>
-          <p:cNvPr id="2" name="Content Placeholder 1"/>
-          <p:cNvSpPr>
-            <a:spLocks noGrp="1"/>
-          </p:cNvSpPr>
-          <p:nvPr>
-            <p:ph idx="1"/>
+          <p:cNvPr id="2" name="Title 1"/>
+          <p:cNvSpPr>
+            <a:spLocks noGrp="1"/>
+          </p:cNvSpPr>
+          <p:nvPr>
+            <p:ph type="title"/>
           </p:nvPr>
         </p:nvSpPr>
         <p:spPr/>
@@ -15183,87 +15201,14 @@
                 <a:latin typeface="Times New Roman" panose="02020603050405020304" pitchFamily="18" charset="0"/>
                 <a:cs typeface="Times New Roman" panose="02020603050405020304" pitchFamily="18" charset="0"/>
               </a:rPr>
-              <a:t>Bengali character recognition has become a vital issue in the last few years.</a:t>
-            </a:r>
-          </a:p>
-          <a:p>
-            <a:r>
-              <a:rPr lang="en-US" dirty="0">
-                <a:latin typeface="Times New Roman" panose="02020603050405020304" pitchFamily="18" charset="0"/>
-                <a:cs typeface="Times New Roman" panose="02020603050405020304" pitchFamily="18" charset="0"/>
-              </a:rPr>
-              <a:t>It is a huge challenge.</a:t>
-            </a:r>
-          </a:p>
-          <a:p>
-            <a:r>
-              <a:rPr lang="en-US" dirty="0">
-                <a:latin typeface="Times New Roman" panose="02020603050405020304" pitchFamily="18" charset="0"/>
-                <a:cs typeface="Times New Roman" panose="02020603050405020304" pitchFamily="18" charset="0"/>
-              </a:rPr>
-              <a:t>We mainly focused on the segmentation process.</a:t>
-            </a:r>
-          </a:p>
-          <a:p>
-            <a:r>
-              <a:rPr lang="en-US" dirty="0">
-                <a:latin typeface="Times New Roman" panose="02020603050405020304" pitchFamily="18" charset="0"/>
-                <a:cs typeface="Times New Roman" panose="02020603050405020304" pitchFamily="18" charset="0"/>
-              </a:rPr>
-              <a:t>We used some basic operations.</a:t>
-            </a:r>
-          </a:p>
-          <a:p>
-            <a:r>
-              <a:rPr lang="en-US" dirty="0">
-                <a:latin typeface="Times New Roman" panose="02020603050405020304" pitchFamily="18" charset="0"/>
-                <a:cs typeface="Times New Roman" panose="02020603050405020304" pitchFamily="18" charset="0"/>
-              </a:rPr>
-              <a:t>We tried to segment the Bengali script that solves the problem of making a good Optical Character Recognition system.</a:t>
-            </a:r>
-          </a:p>
-          <a:p>
-            <a:endParaRPr lang="en-US" dirty="0"/>
-          </a:p>
-        </p:txBody>
-      </p:sp>
-      <p:sp>
-        <p:nvSpPr>
-          <p:cNvPr id="3" name="Title 2"/>
-          <p:cNvSpPr>
-            <a:spLocks noGrp="1"/>
-          </p:cNvSpPr>
-          <p:nvPr>
-            <p:ph type="title"/>
-          </p:nvPr>
-        </p:nvSpPr>
-        <p:spPr/>
-        <p:txBody>
-          <a:bodyPr>
-            <a:normAutofit/>
-          </a:bodyPr>
-          <a:lstStyle/>
-          <a:p>
-            <a:pPr algn="ctr"/>
-            <a:r>
-              <a:rPr lang="en-US" sz="4800" dirty="0">
-                <a:latin typeface="Times New Roman" panose="02020603050405020304" pitchFamily="18" charset="0"/>
-                <a:cs typeface="Times New Roman" panose="02020603050405020304" pitchFamily="18" charset="0"/>
-              </a:rPr>
-              <a:t>Discussion</a:t>
+              <a:t>Accuracy Graph</a:t>
             </a:r>
           </a:p>
         </p:txBody>
       </p:sp>
       <p:pic>
         <p:nvPicPr>
-          <p:cNvPr id="4" name="Picture 3">
-            <a:extLst>
-              <a:ext uri="{FF2B5EF4-FFF2-40B4-BE49-F238E27FC236}">
-                <a16:creationId xmlns:a16="http://schemas.microsoft.com/office/drawing/2014/main" id="{3FD5E3DB-C3FB-40AA-902A-5791C2A127F0}"/>
-              </a:ext>
-            </a:extLst>
-          </p:cNvPr>
+          <p:cNvPr id="6" name="Picture 5" descr="gre.PNG"/>
           <p:cNvPicPr>
             <a:picLocks noChangeAspect="1"/>
           </p:cNvPicPr>
@@ -15277,20 +15222,50 @@
         </p:blipFill>
         <p:spPr>
           <a:xfrm>
-            <a:off x="11094720" y="0"/>
-            <a:ext cx="1092200" cy="1184617"/>
+            <a:off x="3360230" y="1798471"/>
+            <a:ext cx="6058746" cy="3543795"/>
           </a:xfrm>
           <a:prstGeom prst="rect">
             <a:avLst/>
           </a:prstGeom>
         </p:spPr>
       </p:pic>
-      <p:sp>
-        <p:nvSpPr>
-          <p:cNvPr id="5" name="Date Placeholder 4">
-            <a:extLst>
-              <a:ext uri="{FF2B5EF4-FFF2-40B4-BE49-F238E27FC236}">
-                <a16:creationId xmlns:a16="http://schemas.microsoft.com/office/drawing/2014/main" id="{A5D8E16B-7BFD-43A3-8A01-F20FA39B1979}"/>
+      <p:pic>
+        <p:nvPicPr>
+          <p:cNvPr id="7" name="Picture 6">
+            <a:extLst>
+              <a:ext uri="{FF2B5EF4-FFF2-40B4-BE49-F238E27FC236}">
+                <a16:creationId xmlns:a16="http://schemas.microsoft.com/office/drawing/2014/main" id="{E6EDAF98-BA18-422B-B858-6A3E455DF164}"/>
+              </a:ext>
+            </a:extLst>
+          </p:cNvPr>
+          <p:cNvPicPr>
+            <a:picLocks noChangeAspect="1"/>
+          </p:cNvPicPr>
+          <p:nvPr/>
+        </p:nvPicPr>
+        <p:blipFill>
+          <a:blip r:embed="rId3"/>
+          <a:stretch>
+            <a:fillRect/>
+          </a:stretch>
+        </p:blipFill>
+        <p:spPr>
+          <a:xfrm>
+            <a:off x="11094720" y="0"/>
+            <a:ext cx="1092200" cy="1184617"/>
+          </a:xfrm>
+          <a:prstGeom prst="rect">
+            <a:avLst/>
+          </a:prstGeom>
+        </p:spPr>
+      </p:pic>
+      <p:sp>
+        <p:nvSpPr>
+          <p:cNvPr id="3" name="Date Placeholder 2">
+            <a:extLst>
+              <a:ext uri="{FF2B5EF4-FFF2-40B4-BE49-F238E27FC236}">
+                <a16:creationId xmlns:a16="http://schemas.microsoft.com/office/drawing/2014/main" id="{D6B049A7-94C4-4D6E-8E6A-CE10D9973F64}"/>
               </a:ext>
             </a:extLst>
           </p:cNvPr>
@@ -15306,14 +15281,14 @@
           <a:bodyPr/>
           <a:lstStyle/>
           <a:p>
-            <a:fld id="{74A90A6E-B3DA-423D-99FF-81A019BD3FF3}" type="datetime2">
-              <a:rPr lang="en-US" noProof="0" smtClean="0">
+            <a:fld id="{B77F70DC-817D-44CD-A54C-AF3C30502533}" type="datetime2">
+              <a:rPr lang="en-US" smtClean="0">
                 <a:latin typeface="Times New Roman" panose="02020603050405020304" pitchFamily="18" charset="0"/>
                 <a:cs typeface="Times New Roman" panose="02020603050405020304" pitchFamily="18" charset="0"/>
               </a:rPr>
               <a:t>Tuesday, July 7, 2020</a:t>
             </a:fld>
-            <a:endParaRPr lang="en-US" noProof="0" dirty="0">
+            <a:endParaRPr lang="en-US" dirty="0">
               <a:latin typeface="Times New Roman" panose="02020603050405020304" pitchFamily="18" charset="0"/>
               <a:cs typeface="Times New Roman" panose="02020603050405020304" pitchFamily="18" charset="0"/>
             </a:endParaRPr>
@@ -15322,10 +15297,10 @@
       </p:sp>
       <p:sp>
         <p:nvSpPr>
-          <p:cNvPr id="6" name="Footer Placeholder 5">
-            <a:extLst>
-              <a:ext uri="{FF2B5EF4-FFF2-40B4-BE49-F238E27FC236}">
-                <a16:creationId xmlns:a16="http://schemas.microsoft.com/office/drawing/2014/main" id="{C34F2D12-E13D-47D5-97EE-9F72E0795622}"/>
+          <p:cNvPr id="4" name="Footer Placeholder 3">
+            <a:extLst>
+              <a:ext uri="{FF2B5EF4-FFF2-40B4-BE49-F238E27FC236}">
+                <a16:creationId xmlns:a16="http://schemas.microsoft.com/office/drawing/2014/main" id="{A1811881-C655-4425-AA38-2137AC7EF725}"/>
               </a:ext>
             </a:extLst>
           </p:cNvPr>
@@ -15342,7 +15317,7 @@
           <a:lstStyle/>
           <a:p>
             <a:r>
-              <a:rPr lang="en-US" noProof="0" dirty="0">
+              <a:rPr lang="en-US" dirty="0">
                 <a:latin typeface="Times New Roman" panose="02020603050405020304" pitchFamily="18" charset="0"/>
                 <a:cs typeface="Times New Roman" panose="02020603050405020304" pitchFamily="18" charset="0"/>
               </a:rPr>
@@ -15353,10 +15328,10 @@
       </p:sp>
       <p:sp>
         <p:nvSpPr>
-          <p:cNvPr id="7" name="Slide Number Placeholder 6">
-            <a:extLst>
-              <a:ext uri="{FF2B5EF4-FFF2-40B4-BE49-F238E27FC236}">
-                <a16:creationId xmlns:a16="http://schemas.microsoft.com/office/drawing/2014/main" id="{40C08680-D19F-455B-A625-FEFA3FEF498B}"/>
+          <p:cNvPr id="8" name="Slide Number Placeholder 7">
+            <a:extLst>
+              <a:ext uri="{FF2B5EF4-FFF2-40B4-BE49-F238E27FC236}">
+                <a16:creationId xmlns:a16="http://schemas.microsoft.com/office/drawing/2014/main" id="{049ACDF1-AAE1-44C5-9936-EC137AB4B81F}"/>
               </a:ext>
             </a:extLst>
           </p:cNvPr>
@@ -15373,14 +15348,56 @@
           <a:lstStyle/>
           <a:p>
             <a:fld id="{3A98EE3D-8CD1-4C3F-BD1C-C98C9596463C}" type="slidenum">
-              <a:rPr lang="en-US" noProof="0" smtClean="0">
-                <a:latin typeface="Times New Roman" panose="02020603050405020304" pitchFamily="18" charset="0"/>
-                <a:cs typeface="Times New Roman" panose="02020603050405020304" pitchFamily="18" charset="0"/>
-              </a:rPr>
-              <a:pPr/>
+              <a:rPr lang="en-US" smtClean="0">
+                <a:latin typeface="Times New Roman" panose="02020603050405020304" pitchFamily="18" charset="0"/>
+                <a:cs typeface="Times New Roman" panose="02020603050405020304" pitchFamily="18" charset="0"/>
+              </a:rPr>
               <a:t>21</a:t>
             </a:fld>
-            <a:endParaRPr lang="en-US" noProof="0" dirty="0">
+            <a:endParaRPr lang="en-US" dirty="0">
+              <a:latin typeface="Times New Roman" panose="02020603050405020304" pitchFamily="18" charset="0"/>
+              <a:cs typeface="Times New Roman" panose="02020603050405020304" pitchFamily="18" charset="0"/>
+            </a:endParaRPr>
+          </a:p>
+        </p:txBody>
+      </p:sp>
+      <p:sp>
+        <p:nvSpPr>
+          <p:cNvPr id="12" name="TextBox 11">
+            <a:extLst>
+              <a:ext uri="{FF2B5EF4-FFF2-40B4-BE49-F238E27FC236}">
+                <a16:creationId xmlns:a16="http://schemas.microsoft.com/office/drawing/2014/main" id="{407515A3-A3CB-4A4E-BB31-F5CC993070DA}"/>
+              </a:ext>
+            </a:extLst>
+          </p:cNvPr>
+          <p:cNvSpPr txBox="1"/>
+          <p:nvPr/>
+        </p:nvSpPr>
+        <p:spPr>
+          <a:xfrm>
+            <a:off x="634698" y="5709429"/>
+            <a:ext cx="11552222" cy="646331"/>
+          </a:xfrm>
+          <a:prstGeom prst="rect">
+            <a:avLst/>
+          </a:prstGeom>
+          <a:noFill/>
+        </p:spPr>
+        <p:txBody>
+          <a:bodyPr wrap="square" rtlCol="0">
+            <a:spAutoFit/>
+          </a:bodyPr>
+          <a:lstStyle/>
+          <a:p>
+            <a:pPr algn="ctr"/>
+            <a:r>
+              <a:rPr lang="en-US" dirty="0">
+                <a:latin typeface="Times New Roman" panose="02020603050405020304" pitchFamily="18" charset="0"/>
+                <a:cs typeface="Times New Roman" panose="02020603050405020304" pitchFamily="18" charset="0"/>
+              </a:rPr>
+              <a:t>Figure 12: Series1 shows line segmentation, series2 shows word segmentation and series3 shows character segmentation of printed script.</a:t>
+            </a:r>
+            <a:endParaRPr lang="en-US" sz="2400" dirty="0">
               <a:latin typeface="Times New Roman" panose="02020603050405020304" pitchFamily="18" charset="0"/>
               <a:cs typeface="Times New Roman" panose="02020603050405020304" pitchFamily="18" charset="0"/>
             </a:endParaRPr>
@@ -15424,37 +15441,6 @@
         </p:nvSpPr>
         <p:spPr/>
         <p:txBody>
-          <a:bodyPr>
-            <a:normAutofit/>
-          </a:bodyPr>
-          <a:lstStyle/>
-          <a:p>
-            <a:pPr algn="ctr"/>
-            <a:r>
-              <a:rPr lang="en-US" sz="4800" dirty="0">
-                <a:solidFill>
-                  <a:schemeClr val="tx1"/>
-                </a:solidFill>
-                <a:latin typeface="Times New Roman" panose="02020603050405020304" pitchFamily="18" charset="0"/>
-                <a:cs typeface="Times New Roman" panose="02020603050405020304" pitchFamily="18" charset="0"/>
-              </a:rPr>
-              <a:t>Future Scope</a:t>
-            </a:r>
-          </a:p>
-        </p:txBody>
-      </p:sp>
-      <p:sp>
-        <p:nvSpPr>
-          <p:cNvPr id="3" name="Content Placeholder 2"/>
-          <p:cNvSpPr>
-            <a:spLocks noGrp="1"/>
-          </p:cNvSpPr>
-          <p:nvPr>
-            <p:ph idx="1"/>
-          </p:nvPr>
-        </p:nvSpPr>
-        <p:spPr/>
-        <p:txBody>
           <a:bodyPr/>
           <a:lstStyle/>
           <a:p>
@@ -15463,29 +15449,17 @@
                 <a:latin typeface="Times New Roman" panose="02020603050405020304" pitchFamily="18" charset="0"/>
                 <a:cs typeface="Times New Roman" panose="02020603050405020304" pitchFamily="18" charset="0"/>
               </a:rPr>
-              <a:t>We have a plan to use HMM (Hidden Markov model).</a:t>
-            </a:r>
-          </a:p>
-          <a:p>
-            <a:r>
-              <a:rPr lang="en-US" dirty="0">
-                <a:latin typeface="Times New Roman" panose="02020603050405020304" pitchFamily="18" charset="0"/>
-                <a:cs typeface="Times New Roman" panose="02020603050405020304" pitchFamily="18" charset="0"/>
-              </a:rPr>
-              <a:t>We also have plans to use our system for other recognition based research.</a:t>
-            </a:r>
-          </a:p>
-          <a:p>
-            <a:endParaRPr lang="en-US" dirty="0"/>
+              <a:t>Accuracy Graph</a:t>
+            </a:r>
           </a:p>
         </p:txBody>
       </p:sp>
       <p:pic>
         <p:nvPicPr>
-          <p:cNvPr id="4" name="Picture 3">
-            <a:extLst>
-              <a:ext uri="{FF2B5EF4-FFF2-40B4-BE49-F238E27FC236}">
-                <a16:creationId xmlns:a16="http://schemas.microsoft.com/office/drawing/2014/main" id="{319DE3B6-0279-40B4-B496-B8086E9DD424}"/>
+          <p:cNvPr id="7" name="Picture 6">
+            <a:extLst>
+              <a:ext uri="{FF2B5EF4-FFF2-40B4-BE49-F238E27FC236}">
+                <a16:creationId xmlns:a16="http://schemas.microsoft.com/office/drawing/2014/main" id="{E6EDAF98-BA18-422B-B858-6A3E455DF164}"/>
               </a:ext>
             </a:extLst>
           </p:cNvPr>
@@ -15512,10 +15486,10 @@
       </p:pic>
       <p:sp>
         <p:nvSpPr>
-          <p:cNvPr id="5" name="Date Placeholder 4">
-            <a:extLst>
-              <a:ext uri="{FF2B5EF4-FFF2-40B4-BE49-F238E27FC236}">
-                <a16:creationId xmlns:a16="http://schemas.microsoft.com/office/drawing/2014/main" id="{932F7DE6-C497-4A27-B814-C446F0E2C798}"/>
+          <p:cNvPr id="3" name="Date Placeholder 2">
+            <a:extLst>
+              <a:ext uri="{FF2B5EF4-FFF2-40B4-BE49-F238E27FC236}">
+                <a16:creationId xmlns:a16="http://schemas.microsoft.com/office/drawing/2014/main" id="{D6B049A7-94C4-4D6E-8E6A-CE10D9973F64}"/>
               </a:ext>
             </a:extLst>
           </p:cNvPr>
@@ -15531,14 +15505,14 @@
           <a:bodyPr/>
           <a:lstStyle/>
           <a:p>
-            <a:fld id="{41236A9B-AAEF-4473-B088-3AFBF160982C}" type="datetime2">
-              <a:rPr lang="en-US" noProof="0" smtClean="0">
+            <a:fld id="{B77F70DC-817D-44CD-A54C-AF3C30502533}" type="datetime2">
+              <a:rPr lang="en-US" smtClean="0">
                 <a:latin typeface="Times New Roman" panose="02020603050405020304" pitchFamily="18" charset="0"/>
                 <a:cs typeface="Times New Roman" panose="02020603050405020304" pitchFamily="18" charset="0"/>
               </a:rPr>
               <a:t>Tuesday, July 7, 2020</a:t>
             </a:fld>
-            <a:endParaRPr lang="en-US" noProof="0" dirty="0">
+            <a:endParaRPr lang="en-US" dirty="0">
               <a:latin typeface="Times New Roman" panose="02020603050405020304" pitchFamily="18" charset="0"/>
               <a:cs typeface="Times New Roman" panose="02020603050405020304" pitchFamily="18" charset="0"/>
             </a:endParaRPr>
@@ -15547,10 +15521,10 @@
       </p:sp>
       <p:sp>
         <p:nvSpPr>
-          <p:cNvPr id="6" name="Footer Placeholder 5">
-            <a:extLst>
-              <a:ext uri="{FF2B5EF4-FFF2-40B4-BE49-F238E27FC236}">
-                <a16:creationId xmlns:a16="http://schemas.microsoft.com/office/drawing/2014/main" id="{312E5F2C-7700-4212-B9A9-193660C6214C}"/>
+          <p:cNvPr id="4" name="Footer Placeholder 3">
+            <a:extLst>
+              <a:ext uri="{FF2B5EF4-FFF2-40B4-BE49-F238E27FC236}">
+                <a16:creationId xmlns:a16="http://schemas.microsoft.com/office/drawing/2014/main" id="{A1811881-C655-4425-AA38-2137AC7EF725}"/>
               </a:ext>
             </a:extLst>
           </p:cNvPr>
@@ -15567,7 +15541,7 @@
           <a:lstStyle/>
           <a:p>
             <a:r>
-              <a:rPr lang="en-US" noProof="0" dirty="0">
+              <a:rPr lang="en-US" dirty="0">
                 <a:latin typeface="Times New Roman" panose="02020603050405020304" pitchFamily="18" charset="0"/>
                 <a:cs typeface="Times New Roman" panose="02020603050405020304" pitchFamily="18" charset="0"/>
               </a:rPr>
@@ -15578,10 +15552,10 @@
       </p:sp>
       <p:sp>
         <p:nvSpPr>
-          <p:cNvPr id="7" name="Slide Number Placeholder 6">
-            <a:extLst>
-              <a:ext uri="{FF2B5EF4-FFF2-40B4-BE49-F238E27FC236}">
-                <a16:creationId xmlns:a16="http://schemas.microsoft.com/office/drawing/2014/main" id="{95006DDF-BB66-4EF4-AA98-5A5285E7B660}"/>
+          <p:cNvPr id="8" name="Slide Number Placeholder 7">
+            <a:extLst>
+              <a:ext uri="{FF2B5EF4-FFF2-40B4-BE49-F238E27FC236}">
+                <a16:creationId xmlns:a16="http://schemas.microsoft.com/office/drawing/2014/main" id="{049ACDF1-AAE1-44C5-9936-EC137AB4B81F}"/>
               </a:ext>
             </a:extLst>
           </p:cNvPr>
@@ -15598,21 +15572,122 @@
           <a:lstStyle/>
           <a:p>
             <a:fld id="{3A98EE3D-8CD1-4C3F-BD1C-C98C9596463C}" type="slidenum">
-              <a:rPr lang="en-US" noProof="0" smtClean="0">
-                <a:latin typeface="Times New Roman" panose="02020603050405020304" pitchFamily="18" charset="0"/>
-                <a:cs typeface="Times New Roman" panose="02020603050405020304" pitchFamily="18" charset="0"/>
-              </a:rPr>
-              <a:pPr/>
+              <a:rPr lang="en-US" smtClean="0">
+                <a:latin typeface="Times New Roman" panose="02020603050405020304" pitchFamily="18" charset="0"/>
+                <a:cs typeface="Times New Roman" panose="02020603050405020304" pitchFamily="18" charset="0"/>
+              </a:rPr>
               <a:t>22</a:t>
             </a:fld>
-            <a:endParaRPr lang="en-US" noProof="0" dirty="0">
+            <a:endParaRPr lang="en-US" dirty="0">
               <a:latin typeface="Times New Roman" panose="02020603050405020304" pitchFamily="18" charset="0"/>
               <a:cs typeface="Times New Roman" panose="02020603050405020304" pitchFamily="18" charset="0"/>
             </a:endParaRPr>
           </a:p>
         </p:txBody>
       </p:sp>
+      <p:sp>
+        <p:nvSpPr>
+          <p:cNvPr id="12" name="TextBox 11">
+            <a:extLst>
+              <a:ext uri="{FF2B5EF4-FFF2-40B4-BE49-F238E27FC236}">
+                <a16:creationId xmlns:a16="http://schemas.microsoft.com/office/drawing/2014/main" id="{407515A3-A3CB-4A4E-BB31-F5CC993070DA}"/>
+              </a:ext>
+            </a:extLst>
+          </p:cNvPr>
+          <p:cNvSpPr txBox="1"/>
+          <p:nvPr/>
+        </p:nvSpPr>
+        <p:spPr>
+          <a:xfrm>
+            <a:off x="634698" y="5709429"/>
+            <a:ext cx="11552222" cy="646331"/>
+          </a:xfrm>
+          <a:prstGeom prst="rect">
+            <a:avLst/>
+          </a:prstGeom>
+          <a:noFill/>
+        </p:spPr>
+        <p:txBody>
+          <a:bodyPr wrap="square" rtlCol="0">
+            <a:spAutoFit/>
+          </a:bodyPr>
+          <a:lstStyle/>
+          <a:p>
+            <a:pPr algn="ctr"/>
+            <a:r>
+              <a:rPr lang="en-US" dirty="0">
+                <a:latin typeface="Times New Roman" panose="02020603050405020304" pitchFamily="18" charset="0"/>
+                <a:cs typeface="Times New Roman" panose="02020603050405020304" pitchFamily="18" charset="0"/>
+              </a:rPr>
+              <a:t>Figure 12: Series1 shows line segmentation, series2 shows word segmentation and series3</a:t>
+            </a:r>
+          </a:p>
+          <a:p>
+            <a:pPr algn="ctr"/>
+            <a:r>
+              <a:rPr lang="en-US" dirty="0">
+                <a:latin typeface="Times New Roman" panose="02020603050405020304" pitchFamily="18" charset="0"/>
+                <a:cs typeface="Times New Roman" panose="02020603050405020304" pitchFamily="18" charset="0"/>
+              </a:rPr>
+              <a:t>shows </a:t>
+            </a:r>
+            <a:r>
+              <a:rPr lang="en-US">
+                <a:latin typeface="Times New Roman" panose="02020603050405020304" pitchFamily="18" charset="0"/>
+                <a:cs typeface="Times New Roman" panose="02020603050405020304" pitchFamily="18" charset="0"/>
+              </a:rPr>
+              <a:t>character segmentation of </a:t>
+            </a:r>
+            <a:r>
+              <a:rPr lang="en-US" dirty="0">
+                <a:latin typeface="Times New Roman" panose="02020603050405020304" pitchFamily="18" charset="0"/>
+                <a:cs typeface="Times New Roman" panose="02020603050405020304" pitchFamily="18" charset="0"/>
+              </a:rPr>
+              <a:t>handwritten script.</a:t>
+            </a:r>
+            <a:endParaRPr lang="en-US" sz="2400" dirty="0">
+              <a:latin typeface="Times New Roman" panose="02020603050405020304" pitchFamily="18" charset="0"/>
+              <a:cs typeface="Times New Roman" panose="02020603050405020304" pitchFamily="18" charset="0"/>
+            </a:endParaRPr>
+          </a:p>
+        </p:txBody>
+      </p:sp>
+      <p:pic>
+        <p:nvPicPr>
+          <p:cNvPr id="5" name="Picture 4">
+            <a:extLst>
+              <a:ext uri="{FF2B5EF4-FFF2-40B4-BE49-F238E27FC236}">
+                <a16:creationId xmlns:a16="http://schemas.microsoft.com/office/drawing/2014/main" id="{38458085-83B0-4A23-B6AE-AAA05FCB58CE}"/>
+              </a:ext>
+            </a:extLst>
+          </p:cNvPr>
+          <p:cNvPicPr>
+            <a:picLocks noChangeAspect="1"/>
+          </p:cNvPicPr>
+          <p:nvPr/>
+        </p:nvPicPr>
+        <p:blipFill>
+          <a:blip r:embed="rId3"/>
+          <a:stretch>
+            <a:fillRect/>
+          </a:stretch>
+        </p:blipFill>
+        <p:spPr>
+          <a:xfrm>
+            <a:off x="3746233" y="1750306"/>
+            <a:ext cx="4394734" cy="3868045"/>
+          </a:xfrm>
+          <a:prstGeom prst="rect">
+            <a:avLst/>
+          </a:prstGeom>
+        </p:spPr>
+      </p:pic>
     </p:spTree>
+    <p:extLst>
+      <p:ext uri="{BB962C8B-B14F-4D97-AF65-F5344CB8AC3E}">
+        <p14:creationId xmlns:p14="http://schemas.microsoft.com/office/powerpoint/2010/main" val="4047630555"/>
+      </p:ext>
+    </p:extLst>
   </p:cSld>
   <p:clrMapOvr>
     <a:masterClrMapping/>
@@ -15639,37 +15714,76 @@
       </p:grpSpPr>
       <p:sp>
         <p:nvSpPr>
-          <p:cNvPr id="2" name="Title 1"/>
+          <p:cNvPr id="2" name="Content Placeholder 1"/>
+          <p:cNvSpPr>
+            <a:spLocks noGrp="1"/>
+          </p:cNvSpPr>
+          <p:nvPr>
+            <p:ph idx="1"/>
+          </p:nvPr>
+        </p:nvSpPr>
+        <p:spPr/>
+        <p:txBody>
+          <a:bodyPr/>
+          <a:lstStyle/>
+          <a:p>
+            <a:r>
+              <a:rPr lang="en-US" dirty="0">
+                <a:latin typeface="Times New Roman" panose="02020603050405020304" pitchFamily="18" charset="0"/>
+                <a:cs typeface="Times New Roman" panose="02020603050405020304" pitchFamily="18" charset="0"/>
+              </a:rPr>
+              <a:t>Bengali character recognition has become a vital issue in the last few years.</a:t>
+            </a:r>
+          </a:p>
+          <a:p>
+            <a:r>
+              <a:rPr lang="en-US" dirty="0">
+                <a:latin typeface="Times New Roman" panose="02020603050405020304" pitchFamily="18" charset="0"/>
+                <a:cs typeface="Times New Roman" panose="02020603050405020304" pitchFamily="18" charset="0"/>
+              </a:rPr>
+              <a:t>It is a huge challenge.</a:t>
+            </a:r>
+          </a:p>
+          <a:p>
+            <a:r>
+              <a:rPr lang="en-US" dirty="0">
+                <a:latin typeface="Times New Roman" panose="02020603050405020304" pitchFamily="18" charset="0"/>
+                <a:cs typeface="Times New Roman" panose="02020603050405020304" pitchFamily="18" charset="0"/>
+              </a:rPr>
+              <a:t>We mainly focused on the segmentation process.</a:t>
+            </a:r>
+          </a:p>
+          <a:p>
+            <a:r>
+              <a:rPr lang="en-US" dirty="0">
+                <a:latin typeface="Times New Roman" panose="02020603050405020304" pitchFamily="18" charset="0"/>
+                <a:cs typeface="Times New Roman" panose="02020603050405020304" pitchFamily="18" charset="0"/>
+              </a:rPr>
+              <a:t>We used some basic operations.</a:t>
+            </a:r>
+          </a:p>
+          <a:p>
+            <a:r>
+              <a:rPr lang="en-US" dirty="0">
+                <a:latin typeface="Times New Roman" panose="02020603050405020304" pitchFamily="18" charset="0"/>
+                <a:cs typeface="Times New Roman" panose="02020603050405020304" pitchFamily="18" charset="0"/>
+              </a:rPr>
+              <a:t>We tried to segment the Bengali script that solves the problem of making a good Optical Character Recognition system.</a:t>
+            </a:r>
+          </a:p>
+          <a:p>
+            <a:endParaRPr lang="en-US" dirty="0"/>
+          </a:p>
+        </p:txBody>
+      </p:sp>
+      <p:sp>
+        <p:nvSpPr>
+          <p:cNvPr id="3" name="Title 2"/>
           <p:cNvSpPr>
             <a:spLocks noGrp="1"/>
           </p:cNvSpPr>
           <p:nvPr>
             <p:ph type="title"/>
-          </p:nvPr>
-        </p:nvSpPr>
-        <p:spPr/>
-        <p:txBody>
-          <a:bodyPr/>
-          <a:lstStyle/>
-          <a:p>
-            <a:r>
-              <a:rPr lang="en-US" dirty="0">
-                <a:latin typeface="Times New Roman" panose="02020603050405020304" pitchFamily="18" charset="0"/>
-                <a:cs typeface="Times New Roman" panose="02020603050405020304" pitchFamily="18" charset="0"/>
-              </a:rPr>
-              <a:t>Conclusion</a:t>
-            </a:r>
-          </a:p>
-        </p:txBody>
-      </p:sp>
-      <p:sp>
-        <p:nvSpPr>
-          <p:cNvPr id="3" name="Content Placeholder 2"/>
-          <p:cNvSpPr>
-            <a:spLocks noGrp="1"/>
-          </p:cNvSpPr>
-          <p:nvPr>
-            <p:ph idx="1"/>
           </p:nvPr>
         </p:nvSpPr>
         <p:spPr/>
@@ -15679,30 +15793,13 @@
           </a:bodyPr>
           <a:lstStyle/>
           <a:p>
-            <a:r>
-              <a:rPr lang="en-US" sz="2400" dirty="0">
-                <a:latin typeface="Times New Roman" panose="02020603050405020304" pitchFamily="18" charset="0"/>
-                <a:cs typeface="Times New Roman" panose="02020603050405020304" pitchFamily="18" charset="0"/>
-              </a:rPr>
-              <a:t>Performed some methodologies for segmenting Bengali characters.</a:t>
-            </a:r>
-          </a:p>
-          <a:p>
-            <a:r>
-              <a:rPr lang="en-US" sz="2400" dirty="0">
-                <a:latin typeface="Times New Roman" panose="02020603050405020304" pitchFamily="18" charset="0"/>
-                <a:cs typeface="Times New Roman" panose="02020603050405020304" pitchFamily="18" charset="0"/>
-              </a:rPr>
-              <a:t>Applied the morphological image processing operations.</a:t>
-            </a:r>
-          </a:p>
-          <a:p>
-            <a:r>
-              <a:rPr lang="en-US" sz="2400" dirty="0">
-                <a:latin typeface="Times New Roman" panose="02020603050405020304" pitchFamily="18" charset="0"/>
-                <a:cs typeface="Times New Roman" panose="02020603050405020304" pitchFamily="18" charset="0"/>
-              </a:rPr>
-              <a:t>Finally, we got a good accuracy of our system and we are hoping to work with our system to get better accuracy. </a:t>
+            <a:pPr algn="ctr"/>
+            <a:r>
+              <a:rPr lang="en-US" sz="4800" dirty="0">
+                <a:latin typeface="Times New Roman" panose="02020603050405020304" pitchFamily="18" charset="0"/>
+                <a:cs typeface="Times New Roman" panose="02020603050405020304" pitchFamily="18" charset="0"/>
+              </a:rPr>
+              <a:t>Discussion</a:t>
             </a:r>
           </a:p>
         </p:txBody>
@@ -15712,7 +15809,7 @@
           <p:cNvPr id="4" name="Picture 3">
             <a:extLst>
               <a:ext uri="{FF2B5EF4-FFF2-40B4-BE49-F238E27FC236}">
-                <a16:creationId xmlns:a16="http://schemas.microsoft.com/office/drawing/2014/main" id="{15562820-CE57-4C6D-8A0D-6F75C593D689}"/>
+                <a16:creationId xmlns:a16="http://schemas.microsoft.com/office/drawing/2014/main" id="{3FD5E3DB-C3FB-40AA-902A-5791C2A127F0}"/>
               </a:ext>
             </a:extLst>
           </p:cNvPr>
@@ -15742,7 +15839,7 @@
           <p:cNvPr id="5" name="Date Placeholder 4">
             <a:extLst>
               <a:ext uri="{FF2B5EF4-FFF2-40B4-BE49-F238E27FC236}">
-                <a16:creationId xmlns:a16="http://schemas.microsoft.com/office/drawing/2014/main" id="{81EFDBA8-8965-42C3-8432-F5D4A00F86DE}"/>
+                <a16:creationId xmlns:a16="http://schemas.microsoft.com/office/drawing/2014/main" id="{A5D8E16B-7BFD-43A3-8A01-F20FA39B1979}"/>
               </a:ext>
             </a:extLst>
           </p:cNvPr>
@@ -15758,14 +15855,14 @@
           <a:bodyPr/>
           <a:lstStyle/>
           <a:p>
-            <a:fld id="{582276DC-CB4E-4496-BF2A-8A5E66193373}" type="datetime2">
-              <a:rPr lang="en-US" smtClean="0">
+            <a:fld id="{74A90A6E-B3DA-423D-99FF-81A019BD3FF3}" type="datetime2">
+              <a:rPr lang="en-US" noProof="0" smtClean="0">
                 <a:latin typeface="Times New Roman" panose="02020603050405020304" pitchFamily="18" charset="0"/>
                 <a:cs typeface="Times New Roman" panose="02020603050405020304" pitchFamily="18" charset="0"/>
               </a:rPr>
               <a:t>Tuesday, July 7, 2020</a:t>
             </a:fld>
-            <a:endParaRPr lang="en-US" dirty="0">
+            <a:endParaRPr lang="en-US" noProof="0" dirty="0">
               <a:latin typeface="Times New Roman" panose="02020603050405020304" pitchFamily="18" charset="0"/>
               <a:cs typeface="Times New Roman" panose="02020603050405020304" pitchFamily="18" charset="0"/>
             </a:endParaRPr>
@@ -15777,7 +15874,7 @@
           <p:cNvPr id="6" name="Footer Placeholder 5">
             <a:extLst>
               <a:ext uri="{FF2B5EF4-FFF2-40B4-BE49-F238E27FC236}">
-                <a16:creationId xmlns:a16="http://schemas.microsoft.com/office/drawing/2014/main" id="{D3CD1262-8C79-46F9-8688-4CC3AFBA10F7}"/>
+                <a16:creationId xmlns:a16="http://schemas.microsoft.com/office/drawing/2014/main" id="{C34F2D12-E13D-47D5-97EE-9F72E0795622}"/>
               </a:ext>
             </a:extLst>
           </p:cNvPr>
@@ -15794,7 +15891,7 @@
           <a:lstStyle/>
           <a:p>
             <a:r>
-              <a:rPr lang="en-US" dirty="0">
+              <a:rPr lang="en-US" noProof="0" dirty="0">
                 <a:latin typeface="Times New Roman" panose="02020603050405020304" pitchFamily="18" charset="0"/>
                 <a:cs typeface="Times New Roman" panose="02020603050405020304" pitchFamily="18" charset="0"/>
               </a:rPr>
@@ -15808,7 +15905,7 @@
           <p:cNvPr id="7" name="Slide Number Placeholder 6">
             <a:extLst>
               <a:ext uri="{FF2B5EF4-FFF2-40B4-BE49-F238E27FC236}">
-                <a16:creationId xmlns:a16="http://schemas.microsoft.com/office/drawing/2014/main" id="{DD5691B5-BEFA-42FF-A7D1-C646C017D606}"/>
+                <a16:creationId xmlns:a16="http://schemas.microsoft.com/office/drawing/2014/main" id="{40C08680-D19F-455B-A625-FEFA3FEF498B}"/>
               </a:ext>
             </a:extLst>
           </p:cNvPr>
@@ -15825,13 +15922,14 @@
           <a:lstStyle/>
           <a:p>
             <a:fld id="{3A98EE3D-8CD1-4C3F-BD1C-C98C9596463C}" type="slidenum">
-              <a:rPr lang="en-US" smtClean="0">
-                <a:latin typeface="Times New Roman" panose="02020603050405020304" pitchFamily="18" charset="0"/>
-                <a:cs typeface="Times New Roman" panose="02020603050405020304" pitchFamily="18" charset="0"/>
-              </a:rPr>
+              <a:rPr lang="en-US" noProof="0" smtClean="0">
+                <a:latin typeface="Times New Roman" panose="02020603050405020304" pitchFamily="18" charset="0"/>
+                <a:cs typeface="Times New Roman" panose="02020603050405020304" pitchFamily="18" charset="0"/>
+              </a:rPr>
+              <a:pPr/>
               <a:t>23</a:t>
             </a:fld>
-            <a:endParaRPr lang="en-US" dirty="0">
+            <a:endParaRPr lang="en-US" noProof="0" dirty="0">
               <a:latin typeface="Times New Roman" panose="02020603050405020304" pitchFamily="18" charset="0"/>
               <a:cs typeface="Times New Roman" panose="02020603050405020304" pitchFamily="18" charset="0"/>
             </a:endParaRPr>
@@ -15847,6 +15945,457 @@
 </file>
 
 <file path=ppt/slides/slide24.xml><?xml version="1.0" encoding="utf-8"?>
+<p:sld xmlns:a="http://schemas.openxmlformats.org/drawingml/2006/main" xmlns:r="http://schemas.openxmlformats.org/officeDocument/2006/relationships" xmlns:p="http://schemas.openxmlformats.org/presentationml/2006/main">
+  <p:cSld>
+    <p:spTree>
+      <p:nvGrpSpPr>
+        <p:cNvPr id="1" name=""/>
+        <p:cNvGrpSpPr/>
+        <p:nvPr/>
+      </p:nvGrpSpPr>
+      <p:grpSpPr>
+        <a:xfrm>
+          <a:off x="0" y="0"/>
+          <a:ext cx="0" cy="0"/>
+          <a:chOff x="0" y="0"/>
+          <a:chExt cx="0" cy="0"/>
+        </a:xfrm>
+      </p:grpSpPr>
+      <p:sp>
+        <p:nvSpPr>
+          <p:cNvPr id="2" name="Title 1"/>
+          <p:cNvSpPr>
+            <a:spLocks noGrp="1"/>
+          </p:cNvSpPr>
+          <p:nvPr>
+            <p:ph type="title"/>
+          </p:nvPr>
+        </p:nvSpPr>
+        <p:spPr/>
+        <p:txBody>
+          <a:bodyPr>
+            <a:normAutofit/>
+          </a:bodyPr>
+          <a:lstStyle/>
+          <a:p>
+            <a:pPr algn="ctr"/>
+            <a:r>
+              <a:rPr lang="en-US" sz="4800" dirty="0">
+                <a:solidFill>
+                  <a:schemeClr val="tx1"/>
+                </a:solidFill>
+                <a:latin typeface="Times New Roman" panose="02020603050405020304" pitchFamily="18" charset="0"/>
+                <a:cs typeface="Times New Roman" panose="02020603050405020304" pitchFamily="18" charset="0"/>
+              </a:rPr>
+              <a:t>Future Scope</a:t>
+            </a:r>
+          </a:p>
+        </p:txBody>
+      </p:sp>
+      <p:sp>
+        <p:nvSpPr>
+          <p:cNvPr id="3" name="Content Placeholder 2"/>
+          <p:cNvSpPr>
+            <a:spLocks noGrp="1"/>
+          </p:cNvSpPr>
+          <p:nvPr>
+            <p:ph idx="1"/>
+          </p:nvPr>
+        </p:nvSpPr>
+        <p:spPr/>
+        <p:txBody>
+          <a:bodyPr/>
+          <a:lstStyle/>
+          <a:p>
+            <a:r>
+              <a:rPr lang="en-US" dirty="0">
+                <a:latin typeface="Times New Roman" panose="02020603050405020304" pitchFamily="18" charset="0"/>
+                <a:cs typeface="Times New Roman" panose="02020603050405020304" pitchFamily="18" charset="0"/>
+              </a:rPr>
+              <a:t>We have a plan to use HMM (Hidden Markov model).</a:t>
+            </a:r>
+          </a:p>
+          <a:p>
+            <a:r>
+              <a:rPr lang="en-US" dirty="0">
+                <a:latin typeface="Times New Roman" panose="02020603050405020304" pitchFamily="18" charset="0"/>
+                <a:cs typeface="Times New Roman" panose="02020603050405020304" pitchFamily="18" charset="0"/>
+              </a:rPr>
+              <a:t>We also have plans to use our system for other recognition based research.</a:t>
+            </a:r>
+          </a:p>
+          <a:p>
+            <a:endParaRPr lang="en-US" dirty="0"/>
+          </a:p>
+        </p:txBody>
+      </p:sp>
+      <p:pic>
+        <p:nvPicPr>
+          <p:cNvPr id="4" name="Picture 3">
+            <a:extLst>
+              <a:ext uri="{FF2B5EF4-FFF2-40B4-BE49-F238E27FC236}">
+                <a16:creationId xmlns:a16="http://schemas.microsoft.com/office/drawing/2014/main" id="{319DE3B6-0279-40B4-B496-B8086E9DD424}"/>
+              </a:ext>
+            </a:extLst>
+          </p:cNvPr>
+          <p:cNvPicPr>
+            <a:picLocks noChangeAspect="1"/>
+          </p:cNvPicPr>
+          <p:nvPr/>
+        </p:nvPicPr>
+        <p:blipFill>
+          <a:blip r:embed="rId2"/>
+          <a:stretch>
+            <a:fillRect/>
+          </a:stretch>
+        </p:blipFill>
+        <p:spPr>
+          <a:xfrm>
+            <a:off x="11094720" y="0"/>
+            <a:ext cx="1092200" cy="1184617"/>
+          </a:xfrm>
+          <a:prstGeom prst="rect">
+            <a:avLst/>
+          </a:prstGeom>
+        </p:spPr>
+      </p:pic>
+      <p:sp>
+        <p:nvSpPr>
+          <p:cNvPr id="5" name="Date Placeholder 4">
+            <a:extLst>
+              <a:ext uri="{FF2B5EF4-FFF2-40B4-BE49-F238E27FC236}">
+                <a16:creationId xmlns:a16="http://schemas.microsoft.com/office/drawing/2014/main" id="{932F7DE6-C497-4A27-B814-C446F0E2C798}"/>
+              </a:ext>
+            </a:extLst>
+          </p:cNvPr>
+          <p:cNvSpPr>
+            <a:spLocks noGrp="1"/>
+          </p:cNvSpPr>
+          <p:nvPr>
+            <p:ph type="dt" sz="half" idx="10"/>
+          </p:nvPr>
+        </p:nvSpPr>
+        <p:spPr/>
+        <p:txBody>
+          <a:bodyPr/>
+          <a:lstStyle/>
+          <a:p>
+            <a:fld id="{41236A9B-AAEF-4473-B088-3AFBF160982C}" type="datetime2">
+              <a:rPr lang="en-US" noProof="0" smtClean="0">
+                <a:latin typeface="Times New Roman" panose="02020603050405020304" pitchFamily="18" charset="0"/>
+                <a:cs typeface="Times New Roman" panose="02020603050405020304" pitchFamily="18" charset="0"/>
+              </a:rPr>
+              <a:t>Tuesday, July 7, 2020</a:t>
+            </a:fld>
+            <a:endParaRPr lang="en-US" noProof="0" dirty="0">
+              <a:latin typeface="Times New Roman" panose="02020603050405020304" pitchFamily="18" charset="0"/>
+              <a:cs typeface="Times New Roman" panose="02020603050405020304" pitchFamily="18" charset="0"/>
+            </a:endParaRPr>
+          </a:p>
+        </p:txBody>
+      </p:sp>
+      <p:sp>
+        <p:nvSpPr>
+          <p:cNvPr id="6" name="Footer Placeholder 5">
+            <a:extLst>
+              <a:ext uri="{FF2B5EF4-FFF2-40B4-BE49-F238E27FC236}">
+                <a16:creationId xmlns:a16="http://schemas.microsoft.com/office/drawing/2014/main" id="{312E5F2C-7700-4212-B9A9-193660C6214C}"/>
+              </a:ext>
+            </a:extLst>
+          </p:cNvPr>
+          <p:cNvSpPr>
+            <a:spLocks noGrp="1"/>
+          </p:cNvSpPr>
+          <p:nvPr>
+            <p:ph type="ftr" sz="quarter" idx="11"/>
+          </p:nvPr>
+        </p:nvSpPr>
+        <p:spPr/>
+        <p:txBody>
+          <a:bodyPr/>
+          <a:lstStyle/>
+          <a:p>
+            <a:r>
+              <a:rPr lang="en-US" noProof="0" dirty="0">
+                <a:latin typeface="Times New Roman" panose="02020603050405020304" pitchFamily="18" charset="0"/>
+                <a:cs typeface="Times New Roman" panose="02020603050405020304" pitchFamily="18" charset="0"/>
+              </a:rPr>
+              <a:t>Handwritten and printed Bengali script character segmentation using morphological analysis</a:t>
+            </a:r>
+          </a:p>
+        </p:txBody>
+      </p:sp>
+      <p:sp>
+        <p:nvSpPr>
+          <p:cNvPr id="7" name="Slide Number Placeholder 6">
+            <a:extLst>
+              <a:ext uri="{FF2B5EF4-FFF2-40B4-BE49-F238E27FC236}">
+                <a16:creationId xmlns:a16="http://schemas.microsoft.com/office/drawing/2014/main" id="{95006DDF-BB66-4EF4-AA98-5A5285E7B660}"/>
+              </a:ext>
+            </a:extLst>
+          </p:cNvPr>
+          <p:cNvSpPr>
+            <a:spLocks noGrp="1"/>
+          </p:cNvSpPr>
+          <p:nvPr>
+            <p:ph type="sldNum" sz="quarter" idx="12"/>
+          </p:nvPr>
+        </p:nvSpPr>
+        <p:spPr/>
+        <p:txBody>
+          <a:bodyPr/>
+          <a:lstStyle/>
+          <a:p>
+            <a:fld id="{3A98EE3D-8CD1-4C3F-BD1C-C98C9596463C}" type="slidenum">
+              <a:rPr lang="en-US" noProof="0" smtClean="0">
+                <a:latin typeface="Times New Roman" panose="02020603050405020304" pitchFamily="18" charset="0"/>
+                <a:cs typeface="Times New Roman" panose="02020603050405020304" pitchFamily="18" charset="0"/>
+              </a:rPr>
+              <a:pPr/>
+              <a:t>24</a:t>
+            </a:fld>
+            <a:endParaRPr lang="en-US" noProof="0" dirty="0">
+              <a:latin typeface="Times New Roman" panose="02020603050405020304" pitchFamily="18" charset="0"/>
+              <a:cs typeface="Times New Roman" panose="02020603050405020304" pitchFamily="18" charset="0"/>
+            </a:endParaRPr>
+          </a:p>
+        </p:txBody>
+      </p:sp>
+    </p:spTree>
+  </p:cSld>
+  <p:clrMapOvr>
+    <a:masterClrMapping/>
+  </p:clrMapOvr>
+</p:sld>
+</file>
+
+<file path=ppt/slides/slide25.xml><?xml version="1.0" encoding="utf-8"?>
+<p:sld xmlns:a="http://schemas.openxmlformats.org/drawingml/2006/main" xmlns:r="http://schemas.openxmlformats.org/officeDocument/2006/relationships" xmlns:p="http://schemas.openxmlformats.org/presentationml/2006/main">
+  <p:cSld>
+    <p:spTree>
+      <p:nvGrpSpPr>
+        <p:cNvPr id="1" name=""/>
+        <p:cNvGrpSpPr/>
+        <p:nvPr/>
+      </p:nvGrpSpPr>
+      <p:grpSpPr>
+        <a:xfrm>
+          <a:off x="0" y="0"/>
+          <a:ext cx="0" cy="0"/>
+          <a:chOff x="0" y="0"/>
+          <a:chExt cx="0" cy="0"/>
+        </a:xfrm>
+      </p:grpSpPr>
+      <p:sp>
+        <p:nvSpPr>
+          <p:cNvPr id="2" name="Title 1"/>
+          <p:cNvSpPr>
+            <a:spLocks noGrp="1"/>
+          </p:cNvSpPr>
+          <p:nvPr>
+            <p:ph type="title"/>
+          </p:nvPr>
+        </p:nvSpPr>
+        <p:spPr/>
+        <p:txBody>
+          <a:bodyPr/>
+          <a:lstStyle/>
+          <a:p>
+            <a:r>
+              <a:rPr lang="en-US" dirty="0">
+                <a:latin typeface="Times New Roman" panose="02020603050405020304" pitchFamily="18" charset="0"/>
+                <a:cs typeface="Times New Roman" panose="02020603050405020304" pitchFamily="18" charset="0"/>
+              </a:rPr>
+              <a:t>Conclusion</a:t>
+            </a:r>
+          </a:p>
+        </p:txBody>
+      </p:sp>
+      <p:sp>
+        <p:nvSpPr>
+          <p:cNvPr id="3" name="Content Placeholder 2"/>
+          <p:cNvSpPr>
+            <a:spLocks noGrp="1"/>
+          </p:cNvSpPr>
+          <p:nvPr>
+            <p:ph idx="1"/>
+          </p:nvPr>
+        </p:nvSpPr>
+        <p:spPr/>
+        <p:txBody>
+          <a:bodyPr>
+            <a:normAutofit/>
+          </a:bodyPr>
+          <a:lstStyle/>
+          <a:p>
+            <a:r>
+              <a:rPr lang="en-US" sz="2400" dirty="0">
+                <a:latin typeface="Times New Roman" panose="02020603050405020304" pitchFamily="18" charset="0"/>
+                <a:cs typeface="Times New Roman" panose="02020603050405020304" pitchFamily="18" charset="0"/>
+              </a:rPr>
+              <a:t>Performed some methodologies for segmenting Bengali characters.</a:t>
+            </a:r>
+          </a:p>
+          <a:p>
+            <a:r>
+              <a:rPr lang="en-US" sz="2400" dirty="0">
+                <a:latin typeface="Times New Roman" panose="02020603050405020304" pitchFamily="18" charset="0"/>
+                <a:cs typeface="Times New Roman" panose="02020603050405020304" pitchFamily="18" charset="0"/>
+              </a:rPr>
+              <a:t>Applied the morphological image processing operations.</a:t>
+            </a:r>
+          </a:p>
+          <a:p>
+            <a:r>
+              <a:rPr lang="en-US" sz="2400" dirty="0">
+                <a:latin typeface="Times New Roman" panose="02020603050405020304" pitchFamily="18" charset="0"/>
+                <a:cs typeface="Times New Roman" panose="02020603050405020304" pitchFamily="18" charset="0"/>
+              </a:rPr>
+              <a:t>Finally, we got a good accuracy of our system and we are hoping to work with our system to get better accuracy. </a:t>
+            </a:r>
+          </a:p>
+        </p:txBody>
+      </p:sp>
+      <p:pic>
+        <p:nvPicPr>
+          <p:cNvPr id="4" name="Picture 3">
+            <a:extLst>
+              <a:ext uri="{FF2B5EF4-FFF2-40B4-BE49-F238E27FC236}">
+                <a16:creationId xmlns:a16="http://schemas.microsoft.com/office/drawing/2014/main" id="{15562820-CE57-4C6D-8A0D-6F75C593D689}"/>
+              </a:ext>
+            </a:extLst>
+          </p:cNvPr>
+          <p:cNvPicPr>
+            <a:picLocks noChangeAspect="1"/>
+          </p:cNvPicPr>
+          <p:nvPr/>
+        </p:nvPicPr>
+        <p:blipFill>
+          <a:blip r:embed="rId2"/>
+          <a:stretch>
+            <a:fillRect/>
+          </a:stretch>
+        </p:blipFill>
+        <p:spPr>
+          <a:xfrm>
+            <a:off x="11094720" y="0"/>
+            <a:ext cx="1092200" cy="1184617"/>
+          </a:xfrm>
+          <a:prstGeom prst="rect">
+            <a:avLst/>
+          </a:prstGeom>
+        </p:spPr>
+      </p:pic>
+      <p:sp>
+        <p:nvSpPr>
+          <p:cNvPr id="5" name="Date Placeholder 4">
+            <a:extLst>
+              <a:ext uri="{FF2B5EF4-FFF2-40B4-BE49-F238E27FC236}">
+                <a16:creationId xmlns:a16="http://schemas.microsoft.com/office/drawing/2014/main" id="{81EFDBA8-8965-42C3-8432-F5D4A00F86DE}"/>
+              </a:ext>
+            </a:extLst>
+          </p:cNvPr>
+          <p:cNvSpPr>
+            <a:spLocks noGrp="1"/>
+          </p:cNvSpPr>
+          <p:nvPr>
+            <p:ph type="dt" sz="half" idx="10"/>
+          </p:nvPr>
+        </p:nvSpPr>
+        <p:spPr/>
+        <p:txBody>
+          <a:bodyPr/>
+          <a:lstStyle/>
+          <a:p>
+            <a:fld id="{582276DC-CB4E-4496-BF2A-8A5E66193373}" type="datetime2">
+              <a:rPr lang="en-US" smtClean="0">
+                <a:latin typeface="Times New Roman" panose="02020603050405020304" pitchFamily="18" charset="0"/>
+                <a:cs typeface="Times New Roman" panose="02020603050405020304" pitchFamily="18" charset="0"/>
+              </a:rPr>
+              <a:t>Tuesday, July 7, 2020</a:t>
+            </a:fld>
+            <a:endParaRPr lang="en-US" dirty="0">
+              <a:latin typeface="Times New Roman" panose="02020603050405020304" pitchFamily="18" charset="0"/>
+              <a:cs typeface="Times New Roman" panose="02020603050405020304" pitchFamily="18" charset="0"/>
+            </a:endParaRPr>
+          </a:p>
+        </p:txBody>
+      </p:sp>
+      <p:sp>
+        <p:nvSpPr>
+          <p:cNvPr id="6" name="Footer Placeholder 5">
+            <a:extLst>
+              <a:ext uri="{FF2B5EF4-FFF2-40B4-BE49-F238E27FC236}">
+                <a16:creationId xmlns:a16="http://schemas.microsoft.com/office/drawing/2014/main" id="{D3CD1262-8C79-46F9-8688-4CC3AFBA10F7}"/>
+              </a:ext>
+            </a:extLst>
+          </p:cNvPr>
+          <p:cNvSpPr>
+            <a:spLocks noGrp="1"/>
+          </p:cNvSpPr>
+          <p:nvPr>
+            <p:ph type="ftr" sz="quarter" idx="11"/>
+          </p:nvPr>
+        </p:nvSpPr>
+        <p:spPr/>
+        <p:txBody>
+          <a:bodyPr/>
+          <a:lstStyle/>
+          <a:p>
+            <a:r>
+              <a:rPr lang="en-US" dirty="0">
+                <a:latin typeface="Times New Roman" panose="02020603050405020304" pitchFamily="18" charset="0"/>
+                <a:cs typeface="Times New Roman" panose="02020603050405020304" pitchFamily="18" charset="0"/>
+              </a:rPr>
+              <a:t>Handwritten and printed Bengali script character segmentation using morphological analysis</a:t>
+            </a:r>
+          </a:p>
+        </p:txBody>
+      </p:sp>
+      <p:sp>
+        <p:nvSpPr>
+          <p:cNvPr id="7" name="Slide Number Placeholder 6">
+            <a:extLst>
+              <a:ext uri="{FF2B5EF4-FFF2-40B4-BE49-F238E27FC236}">
+                <a16:creationId xmlns:a16="http://schemas.microsoft.com/office/drawing/2014/main" id="{DD5691B5-BEFA-42FF-A7D1-C646C017D606}"/>
+              </a:ext>
+            </a:extLst>
+          </p:cNvPr>
+          <p:cNvSpPr>
+            <a:spLocks noGrp="1"/>
+          </p:cNvSpPr>
+          <p:nvPr>
+            <p:ph type="sldNum" sz="quarter" idx="12"/>
+          </p:nvPr>
+        </p:nvSpPr>
+        <p:spPr/>
+        <p:txBody>
+          <a:bodyPr/>
+          <a:lstStyle/>
+          <a:p>
+            <a:fld id="{3A98EE3D-8CD1-4C3F-BD1C-C98C9596463C}" type="slidenum">
+              <a:rPr lang="en-US" smtClean="0">
+                <a:latin typeface="Times New Roman" panose="02020603050405020304" pitchFamily="18" charset="0"/>
+                <a:cs typeface="Times New Roman" panose="02020603050405020304" pitchFamily="18" charset="0"/>
+              </a:rPr>
+              <a:t>25</a:t>
+            </a:fld>
+            <a:endParaRPr lang="en-US" dirty="0">
+              <a:latin typeface="Times New Roman" panose="02020603050405020304" pitchFamily="18" charset="0"/>
+              <a:cs typeface="Times New Roman" panose="02020603050405020304" pitchFamily="18" charset="0"/>
+            </a:endParaRPr>
+          </a:p>
+        </p:txBody>
+      </p:sp>
+    </p:spTree>
+  </p:cSld>
+  <p:clrMapOvr>
+    <a:masterClrMapping/>
+  </p:clrMapOvr>
+</p:sld>
+</file>
+
+<file path=ppt/slides/slide26.xml><?xml version="1.0" encoding="utf-8"?>
 <p:sld xmlns:a="http://schemas.openxmlformats.org/drawingml/2006/main" xmlns:r="http://schemas.openxmlformats.org/officeDocument/2006/relationships" xmlns:p="http://schemas.openxmlformats.org/presentationml/2006/main">
   <p:cSld>
     <p:bg>
@@ -16210,7 +16759,7 @@
                 <a:latin typeface="Times New Roman" panose="02020603050405020304" pitchFamily="18" charset="0"/>
                 <a:cs typeface="Times New Roman" panose="02020603050405020304" pitchFamily="18" charset="0"/>
               </a:rPr>
-              <a:t>24</a:t>
+              <a:t>26</a:t>
             </a:fld>
             <a:endParaRPr lang="en-US" dirty="0">
               <a:latin typeface="Times New Roman" panose="02020603050405020304" pitchFamily="18" charset="0"/>
@@ -16232,7 +16781,7 @@
 </p:sld>
 </file>
 
-<file path=ppt/slides/slide25.xml><?xml version="1.0" encoding="utf-8"?>
+<file path=ppt/slides/slide27.xml><?xml version="1.0" encoding="utf-8"?>
 <p:sld xmlns:a="http://schemas.openxmlformats.org/drawingml/2006/main" xmlns:r="http://schemas.openxmlformats.org/officeDocument/2006/relationships" xmlns:p="http://schemas.openxmlformats.org/presentationml/2006/main">
   <p:cSld>
     <p:bg>
@@ -16693,7 +17242,7 @@
                 <a:latin typeface="Times New Roman" panose="02020603050405020304" pitchFamily="18" charset="0"/>
                 <a:cs typeface="Times New Roman" panose="02020603050405020304" pitchFamily="18" charset="0"/>
               </a:rPr>
-              <a:t>25</a:t>
+              <a:t>27</a:t>
             </a:fld>
             <a:endParaRPr lang="en-US" dirty="0">
               <a:latin typeface="Times New Roman" panose="02020603050405020304" pitchFamily="18" charset="0"/>

--- a/book/puja.pptx
+++ b/book/puja.pptx
@@ -34,8 +34,8 @@
     <p:sldId id="311" r:id="rId25"/>
     <p:sldId id="315" r:id="rId26"/>
     <p:sldId id="312" r:id="rId27"/>
-    <p:sldId id="297" r:id="rId28"/>
-    <p:sldId id="313" r:id="rId29"/>
+    <p:sldId id="313" r:id="rId28"/>
+    <p:sldId id="297" r:id="rId29"/>
     <p:sldId id="308" r:id="rId30"/>
     <p:sldId id="290" r:id="rId31"/>
   </p:sldIdLst>
@@ -241,7 +241,7 @@
           <a:p>
             <a:fld id="{6748E1AF-6343-46AA-8AEF-4C12F4118850}" type="datetimeFigureOut">
               <a:rPr lang="en-US" smtClean="0"/>
-              <a:t>07-Jul-20</a:t>
+              <a:t>08-Jul-20</a:t>
             </a:fld>
             <a:endParaRPr lang="en-US" dirty="0"/>
           </a:p>
@@ -418,7 +418,7 @@
           <a:p>
             <a:fld id="{DA9D2517-63AA-420A-887D-BE60360A8F4D}" type="datetimeFigureOut">
               <a:rPr lang="en-US" noProof="0" smtClean="0"/>
-              <a:t>07-Jul-20</a:t>
+              <a:t>08-Jul-20</a:t>
             </a:fld>
             <a:endParaRPr lang="en-US" noProof="0" dirty="0"/>
           </a:p>
@@ -987,7 +987,7 @@
           <a:p>
             <a:fld id="{5C9944BB-901F-4101-AAD9-F3F9660A6803}" type="datetime2">
               <a:rPr lang="en-US" noProof="0" smtClean="0"/>
-              <a:t>Tuesday, July 7, 2020</a:t>
+              <a:t>Wednesday, July 8, 2020</a:t>
             </a:fld>
             <a:endParaRPr lang="en-US" noProof="0" dirty="0"/>
           </a:p>
@@ -1606,7 +1606,7 @@
           <a:p>
             <a:fld id="{DD52EFED-3821-4252-B066-81DF622ABB93}" type="datetime2">
               <a:rPr lang="en-US" noProof="0" smtClean="0"/>
-              <a:t>Tuesday, July 7, 2020</a:t>
+              <a:t>Wednesday, July 8, 2020</a:t>
             </a:fld>
             <a:endParaRPr lang="en-US" noProof="0" dirty="0"/>
           </a:p>
@@ -1960,7 +1960,7 @@
           <a:p>
             <a:fld id="{0765F4B2-95AB-4443-9F28-03AD8938EA06}" type="datetime2">
               <a:rPr lang="en-US" smtClean="0"/>
-              <a:t>Tuesday, July 7, 2020</a:t>
+              <a:t>Wednesday, July 8, 2020</a:t>
             </a:fld>
             <a:endParaRPr lang="en-US" dirty="0"/>
           </a:p>
@@ -2356,7 +2356,7 @@
           <a:p>
             <a:fld id="{5BC7D056-A642-43A3-B203-9C21AEAD9466}" type="datetime2">
               <a:rPr lang="en-US" noProof="0" smtClean="0"/>
-              <a:t>Tuesday, July 7, 2020</a:t>
+              <a:t>Wednesday, July 8, 2020</a:t>
             </a:fld>
             <a:endParaRPr lang="en-US" noProof="0" dirty="0"/>
           </a:p>
@@ -2833,7 +2833,7 @@
           <a:p>
             <a:fld id="{D95F6834-5987-445D-80C1-222E1FC2D277}" type="datetime2">
               <a:rPr lang="en-US" noProof="0" smtClean="0"/>
-              <a:t>Tuesday, July 7, 2020</a:t>
+              <a:t>Wednesday, July 8, 2020</a:t>
             </a:fld>
             <a:endParaRPr lang="en-US" noProof="0" dirty="0"/>
           </a:p>
@@ -3218,7 +3218,7 @@
           <a:p>
             <a:fld id="{405D4D86-BCF3-49B6-95C6-F23DD933B6B9}" type="datetime2">
               <a:rPr lang="en-US" noProof="0" smtClean="0"/>
-              <a:t>Tuesday, July 7, 2020</a:t>
+              <a:t>Wednesday, July 8, 2020</a:t>
             </a:fld>
             <a:endParaRPr lang="en-US" noProof="0" dirty="0"/>
           </a:p>
@@ -3580,7 +3580,7 @@
           <a:p>
             <a:fld id="{37A86F2A-3DA7-4B63-9709-3605A14B6A55}" type="datetime2">
               <a:rPr lang="en-US" noProof="0" smtClean="0"/>
-              <a:t>Tuesday, July 7, 2020</a:t>
+              <a:t>Wednesday, July 8, 2020</a:t>
             </a:fld>
             <a:endParaRPr lang="en-US" noProof="0" dirty="0"/>
           </a:p>
@@ -4068,7 +4068,7 @@
           <a:p>
             <a:fld id="{FA3FE53B-DAB0-4423-9FCB-C9083E9C2645}" type="datetime2">
               <a:rPr lang="en-US" noProof="0" smtClean="0"/>
-              <a:t>Tuesday, July 7, 2020</a:t>
+              <a:t>Wednesday, July 8, 2020</a:t>
             </a:fld>
             <a:endParaRPr lang="en-US" noProof="0" dirty="0"/>
           </a:p>
@@ -4563,7 +4563,7 @@
           <a:p>
             <a:fld id="{F4CCD7F3-096C-4E5B-A197-7308942D4001}" type="datetime2">
               <a:rPr lang="en-US" noProof="0" smtClean="0"/>
-              <a:t>Tuesday, July 7, 2020</a:t>
+              <a:t>Wednesday, July 8, 2020</a:t>
             </a:fld>
             <a:endParaRPr lang="en-US" noProof="0" dirty="0"/>
           </a:p>
@@ -4995,7 +4995,7 @@
           <a:p>
             <a:fld id="{093B9231-83C0-4D2F-9AB1-C6ADB0CA623F}" type="datetime2">
               <a:rPr lang="en-US" noProof="0" smtClean="0"/>
-              <a:t>Tuesday, July 7, 2020</a:t>
+              <a:t>Wednesday, July 8, 2020</a:t>
             </a:fld>
             <a:endParaRPr lang="en-US" noProof="0" dirty="0"/>
           </a:p>
@@ -5249,7 +5249,7 @@
           <a:p>
             <a:fld id="{7DD3A87B-D27B-4669-B2FF-81DA53395577}" type="datetime2">
               <a:rPr lang="en-US" smtClean="0"/>
-              <a:t>Tuesday, July 7, 2020</a:t>
+              <a:t>Wednesday, July 8, 2020</a:t>
             </a:fld>
             <a:endParaRPr lang="en-US" dirty="0"/>
           </a:p>
@@ -5480,7 +5480,7 @@
           <a:p>
             <a:fld id="{96CE57BC-BF01-4133-9A7B-333F3E4796E1}" type="datetime2">
               <a:rPr lang="en-US" noProof="0" smtClean="0"/>
-              <a:t>Tuesday, July 7, 2020</a:t>
+              <a:t>Wednesday, July 8, 2020</a:t>
             </a:fld>
             <a:endParaRPr lang="en-US" noProof="0" dirty="0"/>
           </a:p>
@@ -5878,7 +5878,7 @@
           <a:p>
             <a:fld id="{0E06E2B4-71DF-401A-A5AD-E3E9B678914B}" type="datetime2">
               <a:rPr lang="en-US" noProof="0" smtClean="0"/>
-              <a:t>Tuesday, July 7, 2020</a:t>
+              <a:t>Wednesday, July 8, 2020</a:t>
             </a:fld>
             <a:endParaRPr lang="en-US" noProof="0" dirty="0"/>
           </a:p>
@@ -6119,7 +6119,7 @@
           <a:p>
             <a:fld id="{0BB6E837-5E5C-4ABC-B2B6-47473AC749E7}" type="datetime2">
               <a:rPr lang="en-US" smtClean="0"/>
-              <a:t>Tuesday, July 7, 2020</a:t>
+              <a:t>Wednesday, July 8, 2020</a:t>
             </a:fld>
             <a:endParaRPr lang="en-US" dirty="0"/>
           </a:p>
@@ -6317,7 +6317,7 @@
           <a:p>
             <a:fld id="{6E1740BF-A968-409A-BEFD-8D81A8EA189C}" type="datetime2">
               <a:rPr lang="en-US" noProof="0" smtClean="0"/>
-              <a:t>Tuesday, July 7, 2020</a:t>
+              <a:t>Wednesday, July 8, 2020</a:t>
             </a:fld>
             <a:endParaRPr lang="en-US" noProof="0" dirty="0"/>
           </a:p>
@@ -6772,7 +6772,7 @@
           <a:p>
             <a:fld id="{2E2D5AB1-A71C-4946-A337-64380CF8CC9C}" type="datetime2">
               <a:rPr lang="en-US" noProof="0" smtClean="0"/>
-              <a:t>Tuesday, July 7, 2020</a:t>
+              <a:t>Wednesday, July 8, 2020</a:t>
             </a:fld>
             <a:endParaRPr lang="en-US" noProof="0" dirty="0"/>
           </a:p>
@@ -7350,7 +7350,7 @@
           <a:p>
             <a:fld id="{A995E87B-542F-419C-88D5-9A3CC43211E6}" type="datetime2">
               <a:rPr lang="en-US" smtClean="0"/>
-              <a:t>Tuesday, July 7, 2020</a:t>
+              <a:t>Wednesday, July 8, 2020</a:t>
             </a:fld>
             <a:endParaRPr lang="en-US" dirty="0"/>
           </a:p>
@@ -7751,7 +7751,7 @@
           <a:p>
             <a:fld id="{39FD4E80-31CA-4027-8BB1-5262B9EE189A}" type="datetime2">
               <a:rPr lang="en-US" smtClean="0"/>
-              <a:t>Tuesday, July 7, 2020</a:t>
+              <a:t>Wednesday, July 8, 2020</a:t>
             </a:fld>
             <a:endParaRPr lang="en-US" dirty="0"/>
           </a:p>
@@ -7891,7 +7891,7 @@
           <a:p>
             <a:fld id="{62E54B30-F80E-444D-8B0E-80AB9BCEF812}" type="datetime2">
               <a:rPr lang="en-US" smtClean="0"/>
-              <a:t>Tuesday, July 7, 2020</a:t>
+              <a:t>Wednesday, July 8, 2020</a:t>
             </a:fld>
             <a:endParaRPr lang="en-US" dirty="0"/>
           </a:p>
@@ -8081,7 +8081,7 @@
           <a:p>
             <a:fld id="{1AB854B5-8C9F-4641-9122-5745D9CED2A4}" type="datetime2">
               <a:rPr lang="en-US" noProof="0" smtClean="0"/>
-              <a:t>Tuesday, July 7, 2020</a:t>
+              <a:t>Wednesday, July 8, 2020</a:t>
             </a:fld>
             <a:endParaRPr lang="en-US" noProof="0" dirty="0"/>
           </a:p>
@@ -8394,7 +8394,7 @@
           <a:p>
             <a:fld id="{8763756A-7B39-4EF2-9803-2EACB5D7FB84}" type="datetime2">
               <a:rPr lang="en-US" noProof="0" smtClean="0"/>
-              <a:t>Tuesday, July 7, 2020</a:t>
+              <a:t>Wednesday, July 8, 2020</a:t>
             </a:fld>
             <a:endParaRPr lang="en-US" noProof="0" dirty="0"/>
           </a:p>
@@ -9912,7 +9912,7 @@
                 <a:latin typeface="Times New Roman" panose="02020603050405020304" pitchFamily="18" charset="0"/>
                 <a:cs typeface="Times New Roman" panose="02020603050405020304" pitchFamily="18" charset="0"/>
               </a:rPr>
-              <a:t>Tuesday, July 7, 2020</a:t>
+              <a:t>Wednesday, July 8, 2020</a:t>
             </a:fld>
             <a:endParaRPr lang="en-US" noProof="0" dirty="0">
               <a:latin typeface="Times New Roman" panose="02020603050405020304" pitchFamily="18" charset="0"/>
@@ -10496,7 +10496,7 @@
                 <a:latin typeface="Times New Roman" panose="02020603050405020304" pitchFamily="18" charset="0"/>
                 <a:cs typeface="Times New Roman" panose="02020603050405020304" pitchFamily="18" charset="0"/>
               </a:rPr>
-              <a:t>Tuesday, July 7, 2020</a:t>
+              <a:t>Wednesday, July 8, 2020</a:t>
             </a:fld>
             <a:endParaRPr lang="en-US" dirty="0">
               <a:latin typeface="Times New Roman" panose="02020603050405020304" pitchFamily="18" charset="0"/>
@@ -11138,7 +11138,7 @@
                 <a:latin typeface="Times New Roman" panose="02020603050405020304" pitchFamily="18" charset="0"/>
                 <a:cs typeface="Times New Roman" panose="02020603050405020304" pitchFamily="18" charset="0"/>
               </a:rPr>
-              <a:t>Tuesday, July 7, 2020</a:t>
+              <a:t>Wednesday, July 8, 2020</a:t>
             </a:fld>
             <a:endParaRPr lang="en-US" dirty="0">
               <a:latin typeface="Times New Roman" panose="02020603050405020304" pitchFamily="18" charset="0"/>
@@ -11673,7 +11673,7 @@
                 <a:latin typeface="Times New Roman" panose="02020603050405020304" pitchFamily="18" charset="0"/>
                 <a:cs typeface="Times New Roman" panose="02020603050405020304" pitchFamily="18" charset="0"/>
               </a:rPr>
-              <a:t>Tuesday, July 7, 2020</a:t>
+              <a:t>Wednesday, July 8, 2020</a:t>
             </a:fld>
             <a:endParaRPr lang="en-US" dirty="0">
               <a:latin typeface="Times New Roman" panose="02020603050405020304" pitchFamily="18" charset="0"/>
@@ -12208,7 +12208,7 @@
                 <a:latin typeface="Times New Roman" panose="02020603050405020304" pitchFamily="18" charset="0"/>
                 <a:cs typeface="Times New Roman" panose="02020603050405020304" pitchFamily="18" charset="0"/>
               </a:rPr>
-              <a:t>Tuesday, July 7, 2020</a:t>
+              <a:t>Wednesday, July 8, 2020</a:t>
             </a:fld>
             <a:endParaRPr lang="en-US" dirty="0">
               <a:latin typeface="Times New Roman" panose="02020603050405020304" pitchFamily="18" charset="0"/>
@@ -12596,7 +12596,7 @@
                 <a:latin typeface="Times New Roman" panose="02020603050405020304" pitchFamily="18" charset="0"/>
                 <a:cs typeface="Times New Roman" panose="02020603050405020304" pitchFamily="18" charset="0"/>
               </a:rPr>
-              <a:t>Tuesday, July 7, 2020</a:t>
+              <a:t>Wednesday, July 8, 2020</a:t>
             </a:fld>
             <a:endParaRPr lang="en-US" dirty="0">
               <a:latin typeface="Times New Roman" panose="02020603050405020304" pitchFamily="18" charset="0"/>
@@ -12984,7 +12984,7 @@
                 <a:latin typeface="Times New Roman" panose="02020603050405020304" pitchFamily="18" charset="0"/>
                 <a:cs typeface="Times New Roman" panose="02020603050405020304" pitchFamily="18" charset="0"/>
               </a:rPr>
-              <a:t>Tuesday, July 7, 2020</a:t>
+              <a:t>Wednesday, July 8, 2020</a:t>
             </a:fld>
             <a:endParaRPr lang="en-US" dirty="0">
               <a:latin typeface="Times New Roman" panose="02020603050405020304" pitchFamily="18" charset="0"/>
@@ -13372,7 +13372,7 @@
                 <a:latin typeface="Times New Roman" panose="02020603050405020304" pitchFamily="18" charset="0"/>
                 <a:cs typeface="Times New Roman" panose="02020603050405020304" pitchFamily="18" charset="0"/>
               </a:rPr>
-              <a:t>Tuesday, July 7, 2020</a:t>
+              <a:t>Wednesday, July 8, 2020</a:t>
             </a:fld>
             <a:endParaRPr lang="en-US" dirty="0">
               <a:latin typeface="Times New Roman" panose="02020603050405020304" pitchFamily="18" charset="0"/>
@@ -13663,7 +13663,7 @@
                 <a:latin typeface="Times New Roman" panose="02020603050405020304" pitchFamily="18" charset="0"/>
                 <a:cs typeface="Times New Roman" panose="02020603050405020304" pitchFamily="18" charset="0"/>
               </a:rPr>
-              <a:t>Tuesday, July 7, 2020</a:t>
+              <a:t>Wednesday, July 8, 2020</a:t>
             </a:fld>
             <a:endParaRPr lang="en-US" noProof="0" dirty="0">
               <a:latin typeface="Times New Roman" panose="02020603050405020304" pitchFamily="18" charset="0"/>
@@ -14050,7 +14050,7 @@
                 <a:latin typeface="Times New Roman" panose="02020603050405020304" pitchFamily="18" charset="0"/>
                 <a:cs typeface="Times New Roman" panose="02020603050405020304" pitchFamily="18" charset="0"/>
               </a:rPr>
-              <a:t>Tuesday, July 7, 2020</a:t>
+              <a:t>Wednesday, July 8, 2020</a:t>
             </a:fld>
             <a:endParaRPr lang="en-US" dirty="0">
               <a:latin typeface="Times New Roman" panose="02020603050405020304" pitchFamily="18" charset="0"/>
@@ -14236,7 +14236,7 @@
                 <a:latin typeface="Times New Roman" panose="02020603050405020304" pitchFamily="18" charset="0"/>
                 <a:cs typeface="Times New Roman" panose="02020603050405020304" pitchFamily="18" charset="0"/>
               </a:rPr>
-              <a:t>Tuesday, July 7, 2020</a:t>
+              <a:t>Wednesday, July 8, 2020</a:t>
             </a:fld>
             <a:endParaRPr lang="en-US" dirty="0">
               <a:latin typeface="Times New Roman" panose="02020603050405020304" pitchFamily="18" charset="0"/>
@@ -14452,8 +14452,8 @@
         </p:nvSpPr>
         <p:spPr>
           <a:xfrm>
-            <a:off x="4906979" y="787651"/>
-            <a:ext cx="6817260" cy="5115311"/>
+            <a:off x="7340599" y="769722"/>
+            <a:ext cx="4846321" cy="5115311"/>
           </a:xfrm>
           <a:prstGeom prst="rect">
             <a:avLst/>
@@ -14466,7 +14466,7 @@
           </a:bodyPr>
           <a:lstStyle/>
           <a:p>
-            <a:pPr marL="342900" indent="-342900">
+            <a:pPr marL="457200" indent="-457200">
               <a:lnSpc>
                 <a:spcPct val="150000"/>
               </a:lnSpc>
@@ -14482,7 +14482,7 @@
             </a:r>
           </a:p>
           <a:p>
-            <a:pPr marL="342900" indent="-342900">
+            <a:pPr marL="457200" indent="-457200">
               <a:lnSpc>
                 <a:spcPct val="150000"/>
               </a:lnSpc>
@@ -14498,7 +14498,7 @@
             </a:r>
           </a:p>
           <a:p>
-            <a:pPr marL="342900" indent="-342900">
+            <a:pPr marL="457200" indent="-457200">
               <a:lnSpc>
                 <a:spcPct val="150000"/>
               </a:lnSpc>
@@ -14514,7 +14514,7 @@
             </a:r>
           </a:p>
           <a:p>
-            <a:pPr marL="342900" indent="-342900">
+            <a:pPr marL="457200" indent="-457200">
               <a:lnSpc>
                 <a:spcPct val="150000"/>
               </a:lnSpc>
@@ -14526,11 +14526,11 @@
                 <a:latin typeface="Times New Roman" panose="02020603050405020304" pitchFamily="18" charset="0"/>
                 <a:cs typeface="Times New Roman" panose="02020603050405020304" pitchFamily="18" charset="0"/>
               </a:rPr>
-              <a:t>objective</a:t>
-            </a:r>
-          </a:p>
-          <a:p>
-            <a:pPr marL="342900" indent="-342900">
+              <a:t>Objective</a:t>
+            </a:r>
+          </a:p>
+          <a:p>
+            <a:pPr marL="457200" indent="-457200">
               <a:lnSpc>
                 <a:spcPct val="150000"/>
               </a:lnSpc>
@@ -14542,11 +14542,11 @@
                 <a:latin typeface="Times New Roman" panose="02020603050405020304" pitchFamily="18" charset="0"/>
                 <a:cs typeface="Times New Roman" panose="02020603050405020304" pitchFamily="18" charset="0"/>
               </a:rPr>
-              <a:t>literature Review</a:t>
-            </a:r>
-          </a:p>
-          <a:p>
-            <a:pPr marL="342900" indent="-342900">
+              <a:t>Literature Review</a:t>
+            </a:r>
+          </a:p>
+          <a:p>
+            <a:pPr marL="457200" indent="-457200">
               <a:lnSpc>
                 <a:spcPct val="150000"/>
               </a:lnSpc>
@@ -14562,7 +14562,7 @@
             </a:r>
           </a:p>
           <a:p>
-            <a:pPr marL="342900" indent="-342900">
+            <a:pPr marL="457200" indent="-457200">
               <a:lnSpc>
                 <a:spcPct val="150000"/>
               </a:lnSpc>
@@ -14574,11 +14574,11 @@
                 <a:latin typeface="Times New Roman" panose="02020603050405020304" pitchFamily="18" charset="0"/>
                 <a:cs typeface="Times New Roman" panose="02020603050405020304" pitchFamily="18" charset="0"/>
               </a:rPr>
-              <a:t>Preprocessing</a:t>
-            </a:r>
-          </a:p>
-          <a:p>
-            <a:pPr marL="342900" indent="-342900">
+              <a:t>Implementation </a:t>
+            </a:r>
+          </a:p>
+          <a:p>
+            <a:pPr marL="457200" indent="-457200">
               <a:lnSpc>
                 <a:spcPct val="150000"/>
               </a:lnSpc>
@@ -14590,11 +14590,11 @@
                 <a:latin typeface="Times New Roman" panose="02020603050405020304" pitchFamily="18" charset="0"/>
                 <a:cs typeface="Times New Roman" panose="02020603050405020304" pitchFamily="18" charset="0"/>
               </a:rPr>
-              <a:t>Line &amp; Word Segmentation</a:t>
-            </a:r>
-          </a:p>
-          <a:p>
-            <a:pPr marL="342900" indent="-342900">
+              <a:t>Result Analysis</a:t>
+            </a:r>
+          </a:p>
+          <a:p>
+            <a:pPr marL="457200" indent="-457200">
               <a:lnSpc>
                 <a:spcPct val="150000"/>
               </a:lnSpc>
@@ -14606,157 +14606,39 @@
                 <a:latin typeface="Times New Roman" panose="02020603050405020304" pitchFamily="18" charset="0"/>
                 <a:cs typeface="Times New Roman" panose="02020603050405020304" pitchFamily="18" charset="0"/>
               </a:rPr>
-              <a:t>Character Segmentation</a:t>
-            </a:r>
-          </a:p>
-          <a:p>
-            <a:pPr>
-              <a:lnSpc>
-                <a:spcPct val="150000"/>
-              </a:lnSpc>
-            </a:pPr>
-            <a:endParaRPr lang="en-US" sz="2000" dirty="0">
-              <a:latin typeface="Times New Roman" panose="02020603050405020304" pitchFamily="18" charset="0"/>
-              <a:cs typeface="Times New Roman" panose="02020603050405020304" pitchFamily="18" charset="0"/>
-            </a:endParaRPr>
-          </a:p>
-          <a:p>
-            <a:pPr>
-              <a:lnSpc>
-                <a:spcPct val="150000"/>
-              </a:lnSpc>
-            </a:pPr>
-            <a:endParaRPr lang="en-US" sz="2000" dirty="0">
-              <a:latin typeface="Times New Roman" panose="02020603050405020304" pitchFamily="18" charset="0"/>
-              <a:cs typeface="Times New Roman" panose="02020603050405020304" pitchFamily="18" charset="0"/>
-            </a:endParaRPr>
-          </a:p>
-          <a:p>
-            <a:pPr marL="342900" indent="-342900">
+              <a:t>Conclusion</a:t>
+            </a:r>
+          </a:p>
+          <a:p>
+            <a:pPr marL="457200" indent="-457200">
               <a:lnSpc>
                 <a:spcPct val="150000"/>
               </a:lnSpc>
               <a:buFont typeface="+mj-lt"/>
-              <a:buAutoNum type="arabicPeriod" startAt="10"/>
+              <a:buAutoNum type="arabicPeriod"/>
             </a:pPr>
             <a:r>
               <a:rPr lang="en-US" sz="2000" dirty="0">
                 <a:latin typeface="Times New Roman" panose="02020603050405020304" pitchFamily="18" charset="0"/>
                 <a:cs typeface="Times New Roman" panose="02020603050405020304" pitchFamily="18" charset="0"/>
               </a:rPr>
-              <a:t>Result Analysis</a:t>
-            </a:r>
-          </a:p>
-          <a:p>
-            <a:pPr marL="342900" indent="-342900">
+              <a:t>Future Scope</a:t>
+            </a:r>
+          </a:p>
+          <a:p>
+            <a:pPr marL="457200" indent="-457200">
               <a:lnSpc>
                 <a:spcPct val="150000"/>
               </a:lnSpc>
               <a:buFont typeface="+mj-lt"/>
-              <a:buAutoNum type="arabicPeriod" startAt="10"/>
+              <a:buAutoNum type="arabicPeriod"/>
             </a:pPr>
             <a:r>
               <a:rPr lang="en-US" sz="2000" dirty="0">
                 <a:latin typeface="Times New Roman" panose="02020603050405020304" pitchFamily="18" charset="0"/>
                 <a:cs typeface="Times New Roman" panose="02020603050405020304" pitchFamily="18" charset="0"/>
               </a:rPr>
-              <a:t>Tessarect OCR Engine</a:t>
-            </a:r>
-          </a:p>
-          <a:p>
-            <a:pPr marL="342900" indent="-342900">
-              <a:lnSpc>
-                <a:spcPct val="150000"/>
-              </a:lnSpc>
-              <a:buFont typeface="+mj-lt"/>
-              <a:buAutoNum type="arabicPeriod" startAt="10"/>
-            </a:pPr>
-            <a:r>
-              <a:rPr lang="en-US" sz="2000" dirty="0">
-                <a:latin typeface="Times New Roman" panose="02020603050405020304" pitchFamily="18" charset="0"/>
-                <a:cs typeface="Times New Roman" panose="02020603050405020304" pitchFamily="18" charset="0"/>
-              </a:rPr>
-              <a:t>Comparison With Tessarect</a:t>
-            </a:r>
-          </a:p>
-          <a:p>
-            <a:pPr marL="342900" indent="-342900">
-              <a:lnSpc>
-                <a:spcPct val="150000"/>
-              </a:lnSpc>
-              <a:buFont typeface="+mj-lt"/>
-              <a:buAutoNum type="arabicPeriod" startAt="10"/>
-            </a:pPr>
-            <a:r>
-              <a:rPr lang="en-US" sz="2000" dirty="0">
-                <a:latin typeface="Times New Roman" panose="02020603050405020304" pitchFamily="18" charset="0"/>
-                <a:cs typeface="Times New Roman" panose="02020603050405020304" pitchFamily="18" charset="0"/>
-              </a:rPr>
-              <a:t>Accuracy</a:t>
-            </a:r>
-          </a:p>
-          <a:p>
-            <a:pPr marL="342900" indent="-342900">
-              <a:lnSpc>
-                <a:spcPct val="150000"/>
-              </a:lnSpc>
-              <a:buFont typeface="+mj-lt"/>
-              <a:buAutoNum type="arabicPeriod" startAt="10"/>
-            </a:pPr>
-            <a:r>
-              <a:rPr lang="en-US" sz="2000" dirty="0">
-                <a:latin typeface="Times New Roman" panose="02020603050405020304" pitchFamily="18" charset="0"/>
-                <a:cs typeface="Times New Roman" panose="02020603050405020304" pitchFamily="18" charset="0"/>
-              </a:rPr>
-              <a:t>Discussion</a:t>
-            </a:r>
-          </a:p>
-          <a:p>
-            <a:pPr marL="342900" indent="-342900">
-              <a:lnSpc>
-                <a:spcPct val="150000"/>
-              </a:lnSpc>
-              <a:buFont typeface="+mj-lt"/>
-              <a:buAutoNum type="arabicPeriod" startAt="10"/>
-            </a:pPr>
-            <a:r>
-              <a:rPr lang="en-US" sz="2000" dirty="0">
-                <a:latin typeface="Times New Roman" panose="02020603050405020304" pitchFamily="18" charset="0"/>
-                <a:cs typeface="Times New Roman" panose="02020603050405020304" pitchFamily="18" charset="0"/>
-              </a:rPr>
-              <a:t>Future Scope</a:t>
-            </a:r>
-          </a:p>
-          <a:p>
-            <a:pPr marL="342900" indent="-342900">
-              <a:lnSpc>
-                <a:spcPct val="150000"/>
-              </a:lnSpc>
-              <a:buFont typeface="+mj-lt"/>
-              <a:buAutoNum type="arabicPeriod" startAt="10"/>
-            </a:pPr>
-            <a:r>
-              <a:rPr lang="en-US" sz="2000" dirty="0">
-                <a:latin typeface="Times New Roman" panose="02020603050405020304" pitchFamily="18" charset="0"/>
-                <a:cs typeface="Times New Roman" panose="02020603050405020304" pitchFamily="18" charset="0"/>
-              </a:rPr>
-              <a:t>Conclusion</a:t>
-            </a:r>
-          </a:p>
-          <a:p>
-            <a:pPr marL="342900" indent="-342900">
-              <a:lnSpc>
-                <a:spcPct val="150000"/>
-              </a:lnSpc>
-              <a:buFont typeface="+mj-lt"/>
-              <a:buAutoNum type="arabicPeriod" startAt="10"/>
-            </a:pPr>
-            <a:r>
-              <a:rPr lang="en-US" sz="2000" dirty="0">
-                <a:latin typeface="Times New Roman" panose="02020603050405020304" pitchFamily="18" charset="0"/>
-                <a:cs typeface="Times New Roman" panose="02020603050405020304" pitchFamily="18" charset="0"/>
-              </a:rPr>
-              <a:t>Reference </a:t>
+              <a:t>Reference</a:t>
             </a:r>
           </a:p>
         </p:txBody>
@@ -14817,7 +14699,7 @@
                 <a:latin typeface="Times New Roman" panose="02020603050405020304" pitchFamily="18" charset="0"/>
                 <a:cs typeface="Times New Roman" panose="02020603050405020304" pitchFamily="18" charset="0"/>
               </a:rPr>
-              <a:t>Tuesday, July 7, 2020</a:t>
+              <a:t>Wednesday, July 8, 2020</a:t>
             </a:fld>
             <a:endParaRPr lang="en-US" noProof="0" dirty="0">
               <a:latin typeface="Times New Roman" panose="02020603050405020304" pitchFamily="18" charset="0"/>
@@ -15004,7 +14886,7 @@
                 <a:latin typeface="Times New Roman" panose="02020603050405020304" pitchFamily="18" charset="0"/>
                 <a:cs typeface="Times New Roman" panose="02020603050405020304" pitchFamily="18" charset="0"/>
               </a:rPr>
-              <a:t>Tuesday, July 7, 2020</a:t>
+              <a:t>Wednesday, July 8, 2020</a:t>
             </a:fld>
             <a:endParaRPr lang="en-US" dirty="0">
               <a:latin typeface="Times New Roman" panose="02020603050405020304" pitchFamily="18" charset="0"/>
@@ -15286,7 +15168,7 @@
                 <a:latin typeface="Times New Roman" panose="02020603050405020304" pitchFamily="18" charset="0"/>
                 <a:cs typeface="Times New Roman" panose="02020603050405020304" pitchFamily="18" charset="0"/>
               </a:rPr>
-              <a:t>Tuesday, July 7, 2020</a:t>
+              <a:t>Wednesday, July 8, 2020</a:t>
             </a:fld>
             <a:endParaRPr lang="en-US" dirty="0">
               <a:latin typeface="Times New Roman" panose="02020603050405020304" pitchFamily="18" charset="0"/>
@@ -15510,7 +15392,7 @@
                 <a:latin typeface="Times New Roman" panose="02020603050405020304" pitchFamily="18" charset="0"/>
                 <a:cs typeface="Times New Roman" panose="02020603050405020304" pitchFamily="18" charset="0"/>
               </a:rPr>
-              <a:t>Tuesday, July 7, 2020</a:t>
+              <a:t>Wednesday, July 8, 2020</a:t>
             </a:fld>
             <a:endParaRPr lang="en-US" dirty="0">
               <a:latin typeface="Times New Roman" panose="02020603050405020304" pitchFamily="18" charset="0"/>
@@ -15860,7 +15742,7 @@
                 <a:latin typeface="Times New Roman" panose="02020603050405020304" pitchFamily="18" charset="0"/>
                 <a:cs typeface="Times New Roman" panose="02020603050405020304" pitchFamily="18" charset="0"/>
               </a:rPr>
-              <a:t>Tuesday, July 7, 2020</a:t>
+              <a:t>Wednesday, July 8, 2020</a:t>
             </a:fld>
             <a:endParaRPr lang="en-US" noProof="0" dirty="0">
               <a:latin typeface="Times New Roman" panose="02020603050405020304" pitchFamily="18" charset="0"/>
@@ -15973,59 +15855,61 @@
         </p:nvSpPr>
         <p:spPr/>
         <p:txBody>
+          <a:bodyPr/>
+          <a:lstStyle/>
+          <a:p>
+            <a:r>
+              <a:rPr lang="en-US" dirty="0">
+                <a:latin typeface="Times New Roman" panose="02020603050405020304" pitchFamily="18" charset="0"/>
+                <a:cs typeface="Times New Roman" panose="02020603050405020304" pitchFamily="18" charset="0"/>
+              </a:rPr>
+              <a:t>Conclusion</a:t>
+            </a:r>
+          </a:p>
+        </p:txBody>
+      </p:sp>
+      <p:sp>
+        <p:nvSpPr>
+          <p:cNvPr id="3" name="Content Placeholder 2"/>
+          <p:cNvSpPr>
+            <a:spLocks noGrp="1"/>
+          </p:cNvSpPr>
+          <p:nvPr>
+            <p:ph idx="1"/>
+          </p:nvPr>
+        </p:nvSpPr>
+        <p:spPr/>
+        <p:txBody>
           <a:bodyPr>
             <a:normAutofit/>
           </a:bodyPr>
           <a:lstStyle/>
           <a:p>
-            <a:pPr algn="ctr"/>
-            <a:r>
-              <a:rPr lang="en-US" sz="4800" dirty="0">
-                <a:solidFill>
-                  <a:schemeClr val="tx1"/>
-                </a:solidFill>
-                <a:latin typeface="Times New Roman" panose="02020603050405020304" pitchFamily="18" charset="0"/>
-                <a:cs typeface="Times New Roman" panose="02020603050405020304" pitchFamily="18" charset="0"/>
-              </a:rPr>
-              <a:t>Future Scope</a:t>
-            </a:r>
-          </a:p>
-        </p:txBody>
-      </p:sp>
-      <p:sp>
-        <p:nvSpPr>
-          <p:cNvPr id="3" name="Content Placeholder 2"/>
-          <p:cNvSpPr>
-            <a:spLocks noGrp="1"/>
-          </p:cNvSpPr>
-          <p:nvPr>
-            <p:ph idx="1"/>
-          </p:nvPr>
-        </p:nvSpPr>
-        <p:spPr/>
-        <p:txBody>
-          <a:bodyPr/>
-          <a:lstStyle/>
-          <a:p>
-            <a:r>
-              <a:rPr lang="en-US" dirty="0">
-                <a:latin typeface="Times New Roman" panose="02020603050405020304" pitchFamily="18" charset="0"/>
-                <a:cs typeface="Times New Roman" panose="02020603050405020304" pitchFamily="18" charset="0"/>
-              </a:rPr>
-              <a:t>We have a plan to use HMM (Hidden Markov model).</a:t>
-            </a:r>
-          </a:p>
-          <a:p>
-            <a:r>
-              <a:rPr lang="en-US" dirty="0">
-                <a:latin typeface="Times New Roman" panose="02020603050405020304" pitchFamily="18" charset="0"/>
-                <a:cs typeface="Times New Roman" panose="02020603050405020304" pitchFamily="18" charset="0"/>
-              </a:rPr>
-              <a:t>We also have plans to use our system for other recognition based research.</a:t>
-            </a:r>
-          </a:p>
-          <a:p>
-            <a:endParaRPr lang="en-US" dirty="0"/>
+            <a:r>
+              <a:rPr lang="en-US" sz="2400" dirty="0">
+                <a:latin typeface="Times New Roman" panose="02020603050405020304" pitchFamily="18" charset="0"/>
+                <a:cs typeface="Times New Roman" panose="02020603050405020304" pitchFamily="18" charset="0"/>
+              </a:rPr>
+              <a:t>Performed some methodologies for segmenting Bengali characters.</a:t>
+            </a:r>
+          </a:p>
+          <a:p>
+            <a:r>
+              <a:rPr lang="en-US" sz="2400" dirty="0">
+                <a:latin typeface="Times New Roman" panose="02020603050405020304" pitchFamily="18" charset="0"/>
+                <a:cs typeface="Times New Roman" panose="02020603050405020304" pitchFamily="18" charset="0"/>
+              </a:rPr>
+              <a:t>Applied the morphological image processing operations.</a:t>
+            </a:r>
+          </a:p>
+          <a:p>
+            <a:r>
+              <a:rPr lang="en-US" sz="2400" dirty="0">
+                <a:latin typeface="Times New Roman" panose="02020603050405020304" pitchFamily="18" charset="0"/>
+                <a:cs typeface="Times New Roman" panose="02020603050405020304" pitchFamily="18" charset="0"/>
+              </a:rPr>
+              <a:t>Finally, we got a good accuracy of our system and we are hoping to work with our system to get better accuracy. </a:t>
+            </a:r>
           </a:p>
         </p:txBody>
       </p:sp>
@@ -16034,7 +15918,7 @@
           <p:cNvPr id="4" name="Picture 3">
             <a:extLst>
               <a:ext uri="{FF2B5EF4-FFF2-40B4-BE49-F238E27FC236}">
-                <a16:creationId xmlns:a16="http://schemas.microsoft.com/office/drawing/2014/main" id="{319DE3B6-0279-40B4-B496-B8086E9DD424}"/>
+                <a16:creationId xmlns:a16="http://schemas.microsoft.com/office/drawing/2014/main" id="{15562820-CE57-4C6D-8A0D-6F75C593D689}"/>
               </a:ext>
             </a:extLst>
           </p:cNvPr>
@@ -16064,7 +15948,7 @@
           <p:cNvPr id="5" name="Date Placeholder 4">
             <a:extLst>
               <a:ext uri="{FF2B5EF4-FFF2-40B4-BE49-F238E27FC236}">
-                <a16:creationId xmlns:a16="http://schemas.microsoft.com/office/drawing/2014/main" id="{932F7DE6-C497-4A27-B814-C446F0E2C798}"/>
+                <a16:creationId xmlns:a16="http://schemas.microsoft.com/office/drawing/2014/main" id="{81EFDBA8-8965-42C3-8432-F5D4A00F86DE}"/>
               </a:ext>
             </a:extLst>
           </p:cNvPr>
@@ -16080,14 +15964,14 @@
           <a:bodyPr/>
           <a:lstStyle/>
           <a:p>
-            <a:fld id="{41236A9B-AAEF-4473-B088-3AFBF160982C}" type="datetime2">
-              <a:rPr lang="en-US" noProof="0" smtClean="0">
-                <a:latin typeface="Times New Roman" panose="02020603050405020304" pitchFamily="18" charset="0"/>
-                <a:cs typeface="Times New Roman" panose="02020603050405020304" pitchFamily="18" charset="0"/>
-              </a:rPr>
-              <a:t>Tuesday, July 7, 2020</a:t>
+            <a:fld id="{582276DC-CB4E-4496-BF2A-8A5E66193373}" type="datetime2">
+              <a:rPr lang="en-US" smtClean="0">
+                <a:latin typeface="Times New Roman" panose="02020603050405020304" pitchFamily="18" charset="0"/>
+                <a:cs typeface="Times New Roman" panose="02020603050405020304" pitchFamily="18" charset="0"/>
+              </a:rPr>
+              <a:t>Wednesday, July 8, 2020</a:t>
             </a:fld>
-            <a:endParaRPr lang="en-US" noProof="0" dirty="0">
+            <a:endParaRPr lang="en-US" dirty="0">
               <a:latin typeface="Times New Roman" panose="02020603050405020304" pitchFamily="18" charset="0"/>
               <a:cs typeface="Times New Roman" panose="02020603050405020304" pitchFamily="18" charset="0"/>
             </a:endParaRPr>
@@ -16099,7 +15983,7 @@
           <p:cNvPr id="6" name="Footer Placeholder 5">
             <a:extLst>
               <a:ext uri="{FF2B5EF4-FFF2-40B4-BE49-F238E27FC236}">
-                <a16:creationId xmlns:a16="http://schemas.microsoft.com/office/drawing/2014/main" id="{312E5F2C-7700-4212-B9A9-193660C6214C}"/>
+                <a16:creationId xmlns:a16="http://schemas.microsoft.com/office/drawing/2014/main" id="{D3CD1262-8C79-46F9-8688-4CC3AFBA10F7}"/>
               </a:ext>
             </a:extLst>
           </p:cNvPr>
@@ -16116,7 +16000,7 @@
           <a:lstStyle/>
           <a:p>
             <a:r>
-              <a:rPr lang="en-US" noProof="0" dirty="0">
+              <a:rPr lang="en-US" dirty="0">
                 <a:latin typeface="Times New Roman" panose="02020603050405020304" pitchFamily="18" charset="0"/>
                 <a:cs typeface="Times New Roman" panose="02020603050405020304" pitchFamily="18" charset="0"/>
               </a:rPr>
@@ -16130,7 +16014,7 @@
           <p:cNvPr id="7" name="Slide Number Placeholder 6">
             <a:extLst>
               <a:ext uri="{FF2B5EF4-FFF2-40B4-BE49-F238E27FC236}">
-                <a16:creationId xmlns:a16="http://schemas.microsoft.com/office/drawing/2014/main" id="{95006DDF-BB66-4EF4-AA98-5A5285E7B660}"/>
+                <a16:creationId xmlns:a16="http://schemas.microsoft.com/office/drawing/2014/main" id="{DD5691B5-BEFA-42FF-A7D1-C646C017D606}"/>
               </a:ext>
             </a:extLst>
           </p:cNvPr>
@@ -16147,14 +16031,13 @@
           <a:lstStyle/>
           <a:p>
             <a:fld id="{3A98EE3D-8CD1-4C3F-BD1C-C98C9596463C}" type="slidenum">
-              <a:rPr lang="en-US" noProof="0" smtClean="0">
-                <a:latin typeface="Times New Roman" panose="02020603050405020304" pitchFamily="18" charset="0"/>
-                <a:cs typeface="Times New Roman" panose="02020603050405020304" pitchFamily="18" charset="0"/>
-              </a:rPr>
-              <a:pPr/>
+              <a:rPr lang="en-US" smtClean="0">
+                <a:latin typeface="Times New Roman" panose="02020603050405020304" pitchFamily="18" charset="0"/>
+                <a:cs typeface="Times New Roman" panose="02020603050405020304" pitchFamily="18" charset="0"/>
+              </a:rPr>
               <a:t>24</a:t>
             </a:fld>
-            <a:endParaRPr lang="en-US" noProof="0" dirty="0">
+            <a:endParaRPr lang="en-US" dirty="0">
               <a:latin typeface="Times New Roman" panose="02020603050405020304" pitchFamily="18" charset="0"/>
               <a:cs typeface="Times New Roman" panose="02020603050405020304" pitchFamily="18" charset="0"/>
             </a:endParaRPr>
@@ -16198,61 +16081,59 @@
         </p:nvSpPr>
         <p:spPr/>
         <p:txBody>
-          <a:bodyPr/>
-          <a:lstStyle/>
-          <a:p>
-            <a:r>
-              <a:rPr lang="en-US" dirty="0">
-                <a:latin typeface="Times New Roman" panose="02020603050405020304" pitchFamily="18" charset="0"/>
-                <a:cs typeface="Times New Roman" panose="02020603050405020304" pitchFamily="18" charset="0"/>
-              </a:rPr>
-              <a:t>Conclusion</a:t>
-            </a:r>
-          </a:p>
-        </p:txBody>
-      </p:sp>
-      <p:sp>
-        <p:nvSpPr>
-          <p:cNvPr id="3" name="Content Placeholder 2"/>
-          <p:cNvSpPr>
-            <a:spLocks noGrp="1"/>
-          </p:cNvSpPr>
-          <p:nvPr>
-            <p:ph idx="1"/>
-          </p:nvPr>
-        </p:nvSpPr>
-        <p:spPr/>
-        <p:txBody>
           <a:bodyPr>
             <a:normAutofit/>
           </a:bodyPr>
           <a:lstStyle/>
           <a:p>
-            <a:r>
-              <a:rPr lang="en-US" sz="2400" dirty="0">
-                <a:latin typeface="Times New Roman" panose="02020603050405020304" pitchFamily="18" charset="0"/>
-                <a:cs typeface="Times New Roman" panose="02020603050405020304" pitchFamily="18" charset="0"/>
-              </a:rPr>
-              <a:t>Performed some methodologies for segmenting Bengali characters.</a:t>
-            </a:r>
-          </a:p>
-          <a:p>
-            <a:r>
-              <a:rPr lang="en-US" sz="2400" dirty="0">
-                <a:latin typeface="Times New Roman" panose="02020603050405020304" pitchFamily="18" charset="0"/>
-                <a:cs typeface="Times New Roman" panose="02020603050405020304" pitchFamily="18" charset="0"/>
-              </a:rPr>
-              <a:t>Applied the morphological image processing operations.</a:t>
-            </a:r>
-          </a:p>
-          <a:p>
-            <a:r>
-              <a:rPr lang="en-US" sz="2400" dirty="0">
-                <a:latin typeface="Times New Roman" panose="02020603050405020304" pitchFamily="18" charset="0"/>
-                <a:cs typeface="Times New Roman" panose="02020603050405020304" pitchFamily="18" charset="0"/>
-              </a:rPr>
-              <a:t>Finally, we got a good accuracy of our system and we are hoping to work with our system to get better accuracy. </a:t>
-            </a:r>
+            <a:pPr algn="ctr"/>
+            <a:r>
+              <a:rPr lang="en-US" sz="4800" dirty="0">
+                <a:solidFill>
+                  <a:schemeClr val="tx1"/>
+                </a:solidFill>
+                <a:latin typeface="Times New Roman" panose="02020603050405020304" pitchFamily="18" charset="0"/>
+                <a:cs typeface="Times New Roman" panose="02020603050405020304" pitchFamily="18" charset="0"/>
+              </a:rPr>
+              <a:t>Future Scope</a:t>
+            </a:r>
+          </a:p>
+        </p:txBody>
+      </p:sp>
+      <p:sp>
+        <p:nvSpPr>
+          <p:cNvPr id="3" name="Content Placeholder 2"/>
+          <p:cNvSpPr>
+            <a:spLocks noGrp="1"/>
+          </p:cNvSpPr>
+          <p:nvPr>
+            <p:ph idx="1"/>
+          </p:nvPr>
+        </p:nvSpPr>
+        <p:spPr/>
+        <p:txBody>
+          <a:bodyPr/>
+          <a:lstStyle/>
+          <a:p>
+            <a:r>
+              <a:rPr lang="en-US" dirty="0">
+                <a:latin typeface="Times New Roman" panose="02020603050405020304" pitchFamily="18" charset="0"/>
+                <a:cs typeface="Times New Roman" panose="02020603050405020304" pitchFamily="18" charset="0"/>
+              </a:rPr>
+              <a:t>We have a plan to use HMM (Hidden Markov model).</a:t>
+            </a:r>
+          </a:p>
+          <a:p>
+            <a:r>
+              <a:rPr lang="en-US" dirty="0">
+                <a:latin typeface="Times New Roman" panose="02020603050405020304" pitchFamily="18" charset="0"/>
+                <a:cs typeface="Times New Roman" panose="02020603050405020304" pitchFamily="18" charset="0"/>
+              </a:rPr>
+              <a:t>We also have plans to use our system for other recognition based research.</a:t>
+            </a:r>
+          </a:p>
+          <a:p>
+            <a:endParaRPr lang="en-US" dirty="0"/>
           </a:p>
         </p:txBody>
       </p:sp>
@@ -16261,7 +16142,7 @@
           <p:cNvPr id="4" name="Picture 3">
             <a:extLst>
               <a:ext uri="{FF2B5EF4-FFF2-40B4-BE49-F238E27FC236}">
-                <a16:creationId xmlns:a16="http://schemas.microsoft.com/office/drawing/2014/main" id="{15562820-CE57-4C6D-8A0D-6F75C593D689}"/>
+                <a16:creationId xmlns:a16="http://schemas.microsoft.com/office/drawing/2014/main" id="{319DE3B6-0279-40B4-B496-B8086E9DD424}"/>
               </a:ext>
             </a:extLst>
           </p:cNvPr>
@@ -16291,7 +16172,7 @@
           <p:cNvPr id="5" name="Date Placeholder 4">
             <a:extLst>
               <a:ext uri="{FF2B5EF4-FFF2-40B4-BE49-F238E27FC236}">
-                <a16:creationId xmlns:a16="http://schemas.microsoft.com/office/drawing/2014/main" id="{81EFDBA8-8965-42C3-8432-F5D4A00F86DE}"/>
+                <a16:creationId xmlns:a16="http://schemas.microsoft.com/office/drawing/2014/main" id="{932F7DE6-C497-4A27-B814-C446F0E2C798}"/>
               </a:ext>
             </a:extLst>
           </p:cNvPr>
@@ -16307,14 +16188,14 @@
           <a:bodyPr/>
           <a:lstStyle/>
           <a:p>
-            <a:fld id="{582276DC-CB4E-4496-BF2A-8A5E66193373}" type="datetime2">
-              <a:rPr lang="en-US" smtClean="0">
-                <a:latin typeface="Times New Roman" panose="02020603050405020304" pitchFamily="18" charset="0"/>
-                <a:cs typeface="Times New Roman" panose="02020603050405020304" pitchFamily="18" charset="0"/>
-              </a:rPr>
-              <a:t>Tuesday, July 7, 2020</a:t>
+            <a:fld id="{41236A9B-AAEF-4473-B088-3AFBF160982C}" type="datetime2">
+              <a:rPr lang="en-US" noProof="0" smtClean="0">
+                <a:latin typeface="Times New Roman" panose="02020603050405020304" pitchFamily="18" charset="0"/>
+                <a:cs typeface="Times New Roman" panose="02020603050405020304" pitchFamily="18" charset="0"/>
+              </a:rPr>
+              <a:t>Wednesday, July 8, 2020</a:t>
             </a:fld>
-            <a:endParaRPr lang="en-US" dirty="0">
+            <a:endParaRPr lang="en-US" noProof="0" dirty="0">
               <a:latin typeface="Times New Roman" panose="02020603050405020304" pitchFamily="18" charset="0"/>
               <a:cs typeface="Times New Roman" panose="02020603050405020304" pitchFamily="18" charset="0"/>
             </a:endParaRPr>
@@ -16326,7 +16207,7 @@
           <p:cNvPr id="6" name="Footer Placeholder 5">
             <a:extLst>
               <a:ext uri="{FF2B5EF4-FFF2-40B4-BE49-F238E27FC236}">
-                <a16:creationId xmlns:a16="http://schemas.microsoft.com/office/drawing/2014/main" id="{D3CD1262-8C79-46F9-8688-4CC3AFBA10F7}"/>
+                <a16:creationId xmlns:a16="http://schemas.microsoft.com/office/drawing/2014/main" id="{312E5F2C-7700-4212-B9A9-193660C6214C}"/>
               </a:ext>
             </a:extLst>
           </p:cNvPr>
@@ -16343,7 +16224,7 @@
           <a:lstStyle/>
           <a:p>
             <a:r>
-              <a:rPr lang="en-US" dirty="0">
+              <a:rPr lang="en-US" noProof="0" dirty="0">
                 <a:latin typeface="Times New Roman" panose="02020603050405020304" pitchFamily="18" charset="0"/>
                 <a:cs typeface="Times New Roman" panose="02020603050405020304" pitchFamily="18" charset="0"/>
               </a:rPr>
@@ -16357,7 +16238,7 @@
           <p:cNvPr id="7" name="Slide Number Placeholder 6">
             <a:extLst>
               <a:ext uri="{FF2B5EF4-FFF2-40B4-BE49-F238E27FC236}">
-                <a16:creationId xmlns:a16="http://schemas.microsoft.com/office/drawing/2014/main" id="{DD5691B5-BEFA-42FF-A7D1-C646C017D606}"/>
+                <a16:creationId xmlns:a16="http://schemas.microsoft.com/office/drawing/2014/main" id="{95006DDF-BB66-4EF4-AA98-5A5285E7B660}"/>
               </a:ext>
             </a:extLst>
           </p:cNvPr>
@@ -16374,13 +16255,14 @@
           <a:lstStyle/>
           <a:p>
             <a:fld id="{3A98EE3D-8CD1-4C3F-BD1C-C98C9596463C}" type="slidenum">
-              <a:rPr lang="en-US" smtClean="0">
-                <a:latin typeface="Times New Roman" panose="02020603050405020304" pitchFamily="18" charset="0"/>
-                <a:cs typeface="Times New Roman" panose="02020603050405020304" pitchFamily="18" charset="0"/>
-              </a:rPr>
+              <a:rPr lang="en-US" noProof="0" smtClean="0">
+                <a:latin typeface="Times New Roman" panose="02020603050405020304" pitchFamily="18" charset="0"/>
+                <a:cs typeface="Times New Roman" panose="02020603050405020304" pitchFamily="18" charset="0"/>
+              </a:rPr>
+              <a:pPr/>
               <a:t>25</a:t>
             </a:fld>
-            <a:endParaRPr lang="en-US" dirty="0">
+            <a:endParaRPr lang="en-US" noProof="0" dirty="0">
               <a:latin typeface="Times New Roman" panose="02020603050405020304" pitchFamily="18" charset="0"/>
               <a:cs typeface="Times New Roman" panose="02020603050405020304" pitchFamily="18" charset="0"/>
             </a:endParaRPr>
@@ -16693,7 +16575,7 @@
                 <a:latin typeface="Times New Roman" panose="02020603050405020304" pitchFamily="18" charset="0"/>
                 <a:cs typeface="Times New Roman" panose="02020603050405020304" pitchFamily="18" charset="0"/>
               </a:rPr>
-              <a:t>Tuesday, July 7, 2020</a:t>
+              <a:t>Wednesday, July 8, 2020</a:t>
             </a:fld>
             <a:endParaRPr lang="en-US" dirty="0">
               <a:latin typeface="Times New Roman" panose="02020603050405020304" pitchFamily="18" charset="0"/>
@@ -17176,7 +17058,7 @@
                 <a:latin typeface="Times New Roman" panose="02020603050405020304" pitchFamily="18" charset="0"/>
                 <a:cs typeface="Times New Roman" panose="02020603050405020304" pitchFamily="18" charset="0"/>
               </a:rPr>
-              <a:t>Tuesday, July 7, 2020</a:t>
+              <a:t>Wednesday, July 8, 2020</a:t>
             </a:fld>
             <a:endParaRPr lang="en-US" dirty="0">
               <a:latin typeface="Times New Roman" panose="02020603050405020304" pitchFamily="18" charset="0"/>
@@ -17432,7 +17314,7 @@
                 <a:latin typeface="Times New Roman" panose="02020603050405020304" pitchFamily="18" charset="0"/>
                 <a:cs typeface="Times New Roman" panose="02020603050405020304" pitchFamily="18" charset="0"/>
               </a:rPr>
-              <a:t>Tuesday, July 7, 2020</a:t>
+              <a:t>Wednesday, July 8, 2020</a:t>
             </a:fld>
             <a:endParaRPr lang="en-US" noProof="0" dirty="0">
               <a:latin typeface="Times New Roman" panose="02020603050405020304" pitchFamily="18" charset="0"/>
@@ -17698,7 +17580,7 @@
                 <a:latin typeface="Times New Roman" panose="02020603050405020304" pitchFamily="18" charset="0"/>
                 <a:cs typeface="Times New Roman" panose="02020603050405020304" pitchFamily="18" charset="0"/>
               </a:rPr>
-              <a:t>Tuesday, July 7, 2020</a:t>
+              <a:t>Wednesday, July 8, 2020</a:t>
             </a:fld>
             <a:endParaRPr lang="en-US" noProof="0" dirty="0">
               <a:latin typeface="Times New Roman" panose="02020603050405020304" pitchFamily="18" charset="0"/>
@@ -17941,7 +17823,7 @@
                 <a:latin typeface="Times New Roman" panose="02020603050405020304" pitchFamily="18" charset="0"/>
                 <a:cs typeface="Times New Roman" panose="02020603050405020304" pitchFamily="18" charset="0"/>
               </a:rPr>
-              <a:t>Tuesday, July 7, 2020</a:t>
+              <a:t>Wednesday, July 8, 2020</a:t>
             </a:fld>
             <a:endParaRPr lang="en-US" noProof="0" dirty="0">
               <a:latin typeface="Times New Roman" panose="02020603050405020304" pitchFamily="18" charset="0"/>
@@ -18234,7 +18116,7 @@
                 <a:latin typeface="Times New Roman" panose="02020603050405020304" pitchFamily="18" charset="0"/>
                 <a:cs typeface="Times New Roman" panose="02020603050405020304" pitchFamily="18" charset="0"/>
               </a:rPr>
-              <a:t>Tuesday, July 7, 2020</a:t>
+              <a:t>Wednesday, July 8, 2020</a:t>
             </a:fld>
             <a:endParaRPr lang="en-US" noProof="0" dirty="0">
               <a:latin typeface="Times New Roman" panose="02020603050405020304" pitchFamily="18" charset="0"/>
@@ -18510,7 +18392,7 @@
                 <a:latin typeface="Times New Roman" panose="02020603050405020304" pitchFamily="18" charset="0"/>
                 <a:cs typeface="Times New Roman" panose="02020603050405020304" pitchFamily="18" charset="0"/>
               </a:rPr>
-              <a:t>Tuesday, July 7, 2020</a:t>
+              <a:t>Wednesday, July 8, 2020</a:t>
             </a:fld>
             <a:endParaRPr lang="en-US" dirty="0">
               <a:latin typeface="Times New Roman" panose="02020603050405020304" pitchFamily="18" charset="0"/>
@@ -19389,7 +19271,7 @@
                 <a:latin typeface="Times New Roman" panose="02020603050405020304" pitchFamily="18" charset="0"/>
                 <a:cs typeface="Times New Roman" panose="02020603050405020304" pitchFamily="18" charset="0"/>
               </a:rPr>
-              <a:t>Tuesday, July 7, 2020</a:t>
+              <a:t>Wednesday, July 8, 2020</a:t>
             </a:fld>
             <a:endParaRPr lang="en-US" dirty="0">
               <a:latin typeface="Times New Roman" panose="02020603050405020304" pitchFamily="18" charset="0"/>
@@ -20036,7 +19918,7 @@
                 <a:latin typeface="Times New Roman" panose="02020603050405020304" pitchFamily="18" charset="0"/>
                 <a:cs typeface="Times New Roman" panose="02020603050405020304" pitchFamily="18" charset="0"/>
               </a:rPr>
-              <a:t>Tuesday, July 7, 2020</a:t>
+              <a:t>Wednesday, July 8, 2020</a:t>
             </a:fld>
             <a:endParaRPr lang="en-US" dirty="0">
               <a:latin typeface="Times New Roman" panose="02020603050405020304" pitchFamily="18" charset="0"/>
@@ -20998,15 +20880,6 @@
 </file>
 
 <file path=customXml/item1.xml><?xml version="1.0" encoding="utf-8"?>
-<p:properties xmlns:p="http://schemas.microsoft.com/office/2006/metadata/properties" xmlns:xsi="http://www.w3.org/2001/XMLSchema-instance" xmlns:pc="http://schemas.microsoft.com/office/infopath/2007/PartnerControls">
-  <documentManagement>
-    <Status xmlns="71af3243-3dd4-4a8d-8c0d-dd76da1f02a5">Not started</Status>
-    <MediaServiceKeyPoints xmlns="71af3243-3dd4-4a8d-8c0d-dd76da1f02a5" xsi:nil="true"/>
-  </documentManagement>
-</p:properties>
-</file>
-
-<file path=customXml/item2.xml><?xml version="1.0" encoding="utf-8"?>
 <ct:contentTypeSchema xmlns:ct="http://schemas.microsoft.com/office/2006/metadata/contentType" xmlns:ma="http://schemas.microsoft.com/office/2006/metadata/properties/metaAttributes" ct:_="" ma:_="" ma:contentTypeName="Document" ma:contentTypeID="0x01010079F111ED35F8CC479449609E8A0923A6" ma:contentTypeVersion="12" ma:contentTypeDescription="Create a new document." ma:contentTypeScope="" ma:versionID="fa6e671f1cd7e4d96ff9652be322dd5e">
   <xsd:schema xmlns:xsd="http://www.w3.org/2001/XMLSchema" xmlns:xs="http://www.w3.org/2001/XMLSchema" xmlns:p="http://schemas.microsoft.com/office/2006/metadata/properties" xmlns:ns2="71af3243-3dd4-4a8d-8c0d-dd76da1f02a5" xmlns:ns3="16c05727-aa75-4e4a-9b5f-8a80a1165891" targetNamespace="http://schemas.microsoft.com/office/2006/metadata/properties" ma:root="true" ma:fieldsID="4e2496f70b101db0b8013f30a071bbf7" ns2:_="" ns3:_="">
     <xsd:import namespace="71af3243-3dd4-4a8d-8c0d-dd76da1f02a5"/>
@@ -21227,6 +21100,15 @@
 </ct:contentTypeSchema>
 </file>
 
+<file path=customXml/item2.xml><?xml version="1.0" encoding="utf-8"?>
+<p:properties xmlns:p="http://schemas.microsoft.com/office/2006/metadata/properties" xmlns:xsi="http://www.w3.org/2001/XMLSchema-instance" xmlns:pc="http://schemas.microsoft.com/office/infopath/2007/PartnerControls">
+  <documentManagement>
+    <Status xmlns="71af3243-3dd4-4a8d-8c0d-dd76da1f02a5">Not started</Status>
+    <MediaServiceKeyPoints xmlns="71af3243-3dd4-4a8d-8c0d-dd76da1f02a5" xsi:nil="true"/>
+  </documentManagement>
+</p:properties>
+</file>
+
 <file path=customXml/item3.xml><?xml version="1.0" encoding="utf-8"?>
 <?mso-contentType ?>
 <FormTemplates xmlns="http://schemas.microsoft.com/sharepoint/v3/contenttype/forms">
@@ -21237,16 +21119,6 @@
 </file>
 
 <file path=customXml/itemProps1.xml><?xml version="1.0" encoding="utf-8"?>
-<ds:datastoreItem xmlns:ds="http://schemas.openxmlformats.org/officeDocument/2006/customXml" ds:itemID="{A4E879E6-8FFE-4154-8F2A-F7518B89B376}">
-  <ds:schemaRefs>
-    <ds:schemaRef ds:uri="http://schemas.microsoft.com/office/2006/metadata/properties"/>
-    <ds:schemaRef ds:uri="http://schemas.microsoft.com/office/infopath/2007/PartnerControls"/>
-    <ds:schemaRef ds:uri="71af3243-3dd4-4a8d-8c0d-dd76da1f02a5"/>
-  </ds:schemaRefs>
-</ds:datastoreItem>
-</file>
-
-<file path=customXml/itemProps2.xml><?xml version="1.0" encoding="utf-8"?>
 <ds:datastoreItem xmlns:ds="http://schemas.openxmlformats.org/officeDocument/2006/customXml" ds:itemID="{A941CA7C-A0BF-44EF-B2E5-7539C3B9B0B6}">
   <ds:schemaRefs>
     <ds:schemaRef ds:uri="http://schemas.microsoft.com/office/2006/metadata/contentType"/>
@@ -21265,6 +21137,16 @@
 </ds:datastoreItem>
 </file>
 
+<file path=customXml/itemProps2.xml><?xml version="1.0" encoding="utf-8"?>
+<ds:datastoreItem xmlns:ds="http://schemas.openxmlformats.org/officeDocument/2006/customXml" ds:itemID="{A4E879E6-8FFE-4154-8F2A-F7518B89B376}">
+  <ds:schemaRefs>
+    <ds:schemaRef ds:uri="http://schemas.microsoft.com/office/2006/metadata/properties"/>
+    <ds:schemaRef ds:uri="http://schemas.microsoft.com/office/infopath/2007/PartnerControls"/>
+    <ds:schemaRef ds:uri="71af3243-3dd4-4a8d-8c0d-dd76da1f02a5"/>
+  </ds:schemaRefs>
+</ds:datastoreItem>
+</file>
+
 <file path=customXml/itemProps3.xml><?xml version="1.0" encoding="utf-8"?>
 <ds:datastoreItem xmlns:ds="http://schemas.openxmlformats.org/officeDocument/2006/customXml" ds:itemID="{7E0A2CB4-6869-426F-8BC4-A32C90CBE263}">
   <ds:schemaRefs>
